--- a/00_オリエンテーション/【AI Native研修-生成AI】研修の概要.pptx
+++ b/00_オリエンテーション/【AI Native研修-生成AI】研修の概要.pptx
@@ -4214,16 +4214,8 @@
           <a:lstStyle/>
           <a:p>
             <a:r>
-              <a:rPr lang="ja-JP" altLang="en-US" dirty="0"/>
-              <a:t>生成</a:t>
-            </a:r>
-            <a:r>
-              <a:rPr lang="en-US" altLang="ja-JP" dirty="0"/>
-              <a:t>AI</a:t>
-            </a:r>
-            <a:r>
               <a:rPr kumimoji="1" lang="ja-JP" altLang="en-US" dirty="0"/>
-              <a:t>の概要</a:t>
+              <a:t>研修の概要</a:t>
             </a:r>
           </a:p>
         </p:txBody>

--- a/00_オリエンテーション/【AI Native研修-生成AI】研修の概要.pptx
+++ b/00_オリエンテーション/【AI Native研修-生成AI】研修の概要.pptx
@@ -1381,7 +1381,7 @@
 </file>
 
 <file path=ppt/slideLayouts/slideLayout2.xml><?xml version="1.0" encoding="utf-8"?>
-<p:sldLayout xmlns:a="http://schemas.openxmlformats.org/drawingml/2006/main" xmlns:r="http://schemas.openxmlformats.org/officeDocument/2006/relationships" xmlns:p="http://schemas.openxmlformats.org/presentationml/2006/main" type="obj" preserve="1">
+<p:sldLayout xmlns:a="http://schemas.openxmlformats.org/drawingml/2006/main" xmlns:r="http://schemas.openxmlformats.org/officeDocument/2006/relationships" xmlns:p="http://schemas.openxmlformats.org/presentationml/2006/main" preserve="1" userDrawn="1">
   <p:cSld name="タイトルとコンテンツ">
     <p:spTree>
       <p:nvGrpSpPr>
@@ -1399,123 +1399,6 @@
       </p:grpSpPr>
       <p:sp>
         <p:nvSpPr>
-          <p:cNvPr id="2" name="タイトル 1">
-            <a:extLst>
-              <a:ext uri="{FF2B5EF4-FFF2-40B4-BE49-F238E27FC236}">
-                <a16:creationId xmlns:a16="http://schemas.microsoft.com/office/drawing/2014/main" id="{8B9C75F2-6284-9EE3-07F1-8A8C63284933}"/>
-              </a:ext>
-            </a:extLst>
-          </p:cNvPr>
-          <p:cNvSpPr>
-            <a:spLocks noGrp="1"/>
-          </p:cNvSpPr>
-          <p:nvPr>
-            <p:ph type="title"/>
-          </p:nvPr>
-        </p:nvSpPr>
-        <p:spPr/>
-        <p:txBody>
-          <a:bodyPr/>
-          <a:lstStyle/>
-          <a:p>
-            <a:r>
-              <a:rPr kumimoji="1" lang="ja-JP" altLang="en-US"/>
-              <a:t>マスター タイトルの書式設定</a:t>
-            </a:r>
-          </a:p>
-        </p:txBody>
-      </p:sp>
-      <p:sp>
-        <p:nvSpPr>
-          <p:cNvPr id="3" name="コンテンツ プレースホルダー 2">
-            <a:extLst>
-              <a:ext uri="{FF2B5EF4-FFF2-40B4-BE49-F238E27FC236}">
-                <a16:creationId xmlns:a16="http://schemas.microsoft.com/office/drawing/2014/main" id="{03BB957D-55BF-E429-F24B-9AB0F2BC57A6}"/>
-              </a:ext>
-            </a:extLst>
-          </p:cNvPr>
-          <p:cNvSpPr>
-            <a:spLocks noGrp="1"/>
-          </p:cNvSpPr>
-          <p:nvPr>
-            <p:ph idx="1"/>
-          </p:nvPr>
-        </p:nvSpPr>
-        <p:spPr/>
-        <p:txBody>
-          <a:bodyPr/>
-          <a:lstStyle/>
-          <a:p>
-            <a:pPr lvl="0"/>
-            <a:r>
-              <a:rPr kumimoji="1" lang="ja-JP" altLang="en-US"/>
-              <a:t>マスター テキストの書式設定</a:t>
-            </a:r>
-          </a:p>
-          <a:p>
-            <a:pPr lvl="1"/>
-            <a:r>
-              <a:rPr kumimoji="1" lang="ja-JP" altLang="en-US"/>
-              <a:t>第 </a:t>
-            </a:r>
-            <a:r>
-              <a:rPr kumimoji="1" lang="en-US" altLang="ja-JP"/>
-              <a:t>2 </a:t>
-            </a:r>
-            <a:r>
-              <a:rPr kumimoji="1" lang="ja-JP" altLang="en-US"/>
-              <a:t>レベル</a:t>
-            </a:r>
-          </a:p>
-          <a:p>
-            <a:pPr lvl="2"/>
-            <a:r>
-              <a:rPr kumimoji="1" lang="ja-JP" altLang="en-US"/>
-              <a:t>第 </a:t>
-            </a:r>
-            <a:r>
-              <a:rPr kumimoji="1" lang="en-US" altLang="ja-JP"/>
-              <a:t>3 </a:t>
-            </a:r>
-            <a:r>
-              <a:rPr kumimoji="1" lang="ja-JP" altLang="en-US"/>
-              <a:t>レベル</a:t>
-            </a:r>
-          </a:p>
-          <a:p>
-            <a:pPr lvl="3"/>
-            <a:r>
-              <a:rPr kumimoji="1" lang="ja-JP" altLang="en-US"/>
-              <a:t>第 </a:t>
-            </a:r>
-            <a:r>
-              <a:rPr kumimoji="1" lang="en-US" altLang="ja-JP"/>
-              <a:t>4 </a:t>
-            </a:r>
-            <a:r>
-              <a:rPr kumimoji="1" lang="ja-JP" altLang="en-US"/>
-              <a:t>レベル</a:t>
-            </a:r>
-          </a:p>
-          <a:p>
-            <a:pPr lvl="4"/>
-            <a:r>
-              <a:rPr kumimoji="1" lang="ja-JP" altLang="en-US"/>
-              <a:t>第 </a:t>
-            </a:r>
-            <a:r>
-              <a:rPr kumimoji="1" lang="en-US" altLang="ja-JP"/>
-              <a:t>5 </a:t>
-            </a:r>
-            <a:r>
-              <a:rPr kumimoji="1" lang="ja-JP" altLang="en-US"/>
-              <a:t>レベル</a:t>
-            </a:r>
-          </a:p>
-        </p:txBody>
-      </p:sp>
-      <p:sp>
-        <p:nvSpPr>
           <p:cNvPr id="4" name="日付プレースホルダー 3">
             <a:extLst>
               <a:ext uri="{FF2B5EF4-FFF2-40B4-BE49-F238E27FC236}">
@@ -1594,6 +1477,142 @@
               <a:t>‹#›</a:t>
             </a:fld>
             <a:endParaRPr kumimoji="1" lang="ja-JP" altLang="en-US"/>
+          </a:p>
+        </p:txBody>
+      </p:sp>
+      <p:sp>
+        <p:nvSpPr>
+          <p:cNvPr id="13" name="タイトル 1">
+            <a:extLst>
+              <a:ext uri="{FF2B5EF4-FFF2-40B4-BE49-F238E27FC236}">
+                <a16:creationId xmlns:a16="http://schemas.microsoft.com/office/drawing/2014/main" id="{A8302D35-8D17-DF03-C1F5-73D20A84F3EF}"/>
+              </a:ext>
+            </a:extLst>
+          </p:cNvPr>
+          <p:cNvSpPr>
+            <a:spLocks noGrp="1"/>
+          </p:cNvSpPr>
+          <p:nvPr>
+            <p:ph type="title"/>
+          </p:nvPr>
+        </p:nvSpPr>
+        <p:spPr>
+          <a:xfrm>
+            <a:off x="167951" y="365124"/>
+            <a:ext cx="11877869" cy="540000"/>
+          </a:xfrm>
+        </p:spPr>
+        <p:txBody>
+          <a:bodyPr>
+            <a:normAutofit/>
+          </a:bodyPr>
+          <a:lstStyle>
+            <a:lvl1pPr>
+              <a:defRPr sz="2400" b="1">
+                <a:latin typeface="Meiryo UI" panose="020B0604030504040204" pitchFamily="50" charset="-128"/>
+                <a:ea typeface="Meiryo UI" panose="020B0604030504040204" pitchFamily="50" charset="-128"/>
+              </a:defRPr>
+            </a:lvl1pPr>
+          </a:lstStyle>
+          <a:p>
+            <a:r>
+              <a:rPr kumimoji="1" lang="ja-JP" altLang="en-US" dirty="0"/>
+              <a:t>マスター タイトルの書式設定</a:t>
+            </a:r>
+          </a:p>
+        </p:txBody>
+      </p:sp>
+      <p:sp>
+        <p:nvSpPr>
+          <p:cNvPr id="14" name="コンテンツ プレースホルダー 2">
+            <a:extLst>
+              <a:ext uri="{FF2B5EF4-FFF2-40B4-BE49-F238E27FC236}">
+                <a16:creationId xmlns:a16="http://schemas.microsoft.com/office/drawing/2014/main" id="{630B5AC0-4267-B83C-555E-E08AE0C09536}"/>
+              </a:ext>
+            </a:extLst>
+          </p:cNvPr>
+          <p:cNvSpPr>
+            <a:spLocks noGrp="1"/>
+          </p:cNvSpPr>
+          <p:nvPr>
+            <p:ph idx="1"/>
+          </p:nvPr>
+        </p:nvSpPr>
+        <p:spPr>
+          <a:xfrm>
+            <a:off x="167951" y="1073020"/>
+            <a:ext cx="11877869" cy="5103943"/>
+          </a:xfrm>
+        </p:spPr>
+        <p:txBody>
+          <a:bodyPr/>
+          <a:lstStyle/>
+          <a:p>
+            <a:pPr lvl="0"/>
+            <a:r>
+              <a:rPr kumimoji="1" lang="ja-JP" altLang="en-US" dirty="0"/>
+              <a:t>マスター テキストの書式設定</a:t>
+            </a:r>
+          </a:p>
+          <a:p>
+            <a:pPr lvl="1"/>
+            <a:r>
+              <a:rPr kumimoji="1" lang="ja-JP" altLang="en-US" dirty="0"/>
+              <a:t>第 </a:t>
+            </a:r>
+            <a:r>
+              <a:rPr kumimoji="1" lang="en-US" altLang="ja-JP" dirty="0"/>
+              <a:t>2 </a:t>
+            </a:r>
+            <a:r>
+              <a:rPr kumimoji="1" lang="ja-JP" altLang="en-US" dirty="0"/>
+              <a:t>レベル</a:t>
+            </a:r>
+          </a:p>
+          <a:p>
+            <a:pPr lvl="2"/>
+            <a:r>
+              <a:rPr kumimoji="1" lang="ja-JP" altLang="en-US" dirty="0"/>
+              <a:t>第 </a:t>
+            </a:r>
+            <a:r>
+              <a:rPr kumimoji="1" lang="en-US" altLang="ja-JP" dirty="0"/>
+              <a:t>3 </a:t>
+            </a:r>
+            <a:r>
+              <a:rPr kumimoji="1" lang="ja-JP" altLang="en-US" dirty="0"/>
+              <a:t>レベル</a:t>
+            </a:r>
+          </a:p>
+          <a:p>
+            <a:pPr lvl="3"/>
+            <a:r>
+              <a:rPr kumimoji="1" lang="ja-JP" altLang="en-US" dirty="0"/>
+              <a:t>第 </a:t>
+            </a:r>
+            <a:r>
+              <a:rPr kumimoji="1" lang="en-US" altLang="ja-JP" dirty="0"/>
+              <a:t>4 </a:t>
+            </a:r>
+            <a:r>
+              <a:rPr kumimoji="1" lang="ja-JP" altLang="en-US" dirty="0"/>
+              <a:t>レベル</a:t>
+            </a:r>
+          </a:p>
+          <a:p>
+            <a:pPr lvl="4"/>
+            <a:r>
+              <a:rPr kumimoji="1" lang="ja-JP" altLang="en-US" dirty="0"/>
+              <a:t>第 </a:t>
+            </a:r>
+            <a:r>
+              <a:rPr kumimoji="1" lang="en-US" altLang="ja-JP" dirty="0"/>
+              <a:t>5 </a:t>
+            </a:r>
+            <a:r>
+              <a:rPr kumimoji="1" lang="ja-JP" altLang="en-US" dirty="0"/>
+              <a:t>レベル</a:t>
+            </a:r>
           </a:p>
         </p:txBody>
       </p:sp>
@@ -4290,13 +4309,13 @@
           <p:nvPr>
             <p:extLst>
               <p:ext uri="{D42A27DB-BD31-4B8C-83A1-F6EECF244321}">
-                <p14:modId xmlns:p14="http://schemas.microsoft.com/office/powerpoint/2010/main" val="3551581941"/>
+                <p14:modId xmlns:p14="http://schemas.microsoft.com/office/powerpoint/2010/main" val="1733711896"/>
               </p:ext>
             </p:extLst>
           </p:nvPr>
         </p:nvGraphicFramePr>
         <p:xfrm>
-          <a:off x="389738" y="858160"/>
+          <a:off x="162341" y="1073020"/>
           <a:ext cx="3943722" cy="5075501"/>
         </p:xfrm>
         <a:graphic>
@@ -4598,7 +4617,7 @@
         </p:nvGrpSpPr>
         <p:grpSpPr>
           <a:xfrm>
-            <a:off x="561599" y="1394089"/>
+            <a:off x="334202" y="1608949"/>
             <a:ext cx="3600000" cy="1648169"/>
             <a:chOff x="946296" y="1364275"/>
             <a:chExt cx="4359349" cy="1659133"/>
@@ -5026,32 +5045,19 @@
               <a:tabLst/>
               <a:defRPr/>
             </a:pPr>
-            <a:r>
-              <a:rPr lang="ja-JP" altLang="en-US" dirty="0">
-                <a:solidFill>
-                  <a:srgbClr val="070F26"/>
-                </a:solidFill>
-                <a:latin typeface="Meiryo UI"/>
-                <a:ea typeface="Meiryo UI"/>
-              </a:rPr>
-              <a:t>研修</a:t>
-            </a:r>
-            <a:r>
-              <a:rPr kumimoji="1" lang="ja-JP" altLang="en-US" sz="2600" b="1" i="0" u="none" strike="noStrike" kern="1200" cap="none" spc="0" normalizeH="0" baseline="0" noProof="0" dirty="0">
-                <a:ln>
-                  <a:noFill/>
-                </a:ln>
-                <a:solidFill>
-                  <a:srgbClr val="070F26"/>
-                </a:solidFill>
-                <a:effectLst/>
-                <a:uLnTx/>
-                <a:uFillTx/>
-                <a:latin typeface="Meiryo UI"/>
-                <a:ea typeface="Meiryo UI"/>
-              </a:rPr>
-              <a:t>の全体像について</a:t>
-            </a:r>
+            <a:endParaRPr kumimoji="1" lang="ja-JP" altLang="en-US" sz="2600" b="1" i="0" u="none" strike="noStrike" kern="1200" cap="none" spc="0" normalizeH="0" baseline="0" noProof="0" dirty="0">
+              <a:ln>
+                <a:noFill/>
+              </a:ln>
+              <a:solidFill>
+                <a:srgbClr val="070F26"/>
+              </a:solidFill>
+              <a:effectLst/>
+              <a:uLnTx/>
+              <a:uFillTx/>
+              <a:latin typeface="Meiryo UI"/>
+              <a:ea typeface="Meiryo UI"/>
+            </a:endParaRPr>
           </a:p>
         </p:txBody>
       </p:sp>
@@ -5069,7 +5075,7 @@
         </p:nvSpPr>
         <p:spPr>
           <a:xfrm>
-            <a:off x="741599" y="2069700"/>
+            <a:off x="514202" y="2284560"/>
             <a:ext cx="3240000" cy="360000"/>
           </a:xfrm>
           <a:prstGeom prst="roundRect">
@@ -5193,7 +5199,7 @@
         </p:nvSpPr>
         <p:spPr>
           <a:xfrm>
-            <a:off x="741599" y="2555979"/>
+            <a:off x="514202" y="2770839"/>
             <a:ext cx="3240000" cy="360000"/>
           </a:xfrm>
           <a:prstGeom prst="roundRect">
@@ -5297,7 +5303,7 @@
         </p:nvSpPr>
         <p:spPr>
           <a:xfrm>
-            <a:off x="2181599" y="3280277"/>
+            <a:off x="1954202" y="3495137"/>
             <a:ext cx="360000" cy="180000"/>
           </a:xfrm>
           <a:prstGeom prst="downArrow">
@@ -5371,7 +5377,7 @@
         </p:nvGrpSpPr>
         <p:grpSpPr>
           <a:xfrm>
-            <a:off x="561599" y="3710349"/>
+            <a:off x="334202" y="3925209"/>
             <a:ext cx="3600000" cy="936522"/>
             <a:chOff x="946296" y="5714099"/>
             <a:chExt cx="4359349" cy="936522"/>
@@ -5547,6 +5553,41 @@
           </p:txBody>
         </p:sp>
       </p:grpSp>
+      <p:sp>
+        <p:nvSpPr>
+          <p:cNvPr id="2" name="タイトル 1">
+            <a:extLst>
+              <a:ext uri="{FF2B5EF4-FFF2-40B4-BE49-F238E27FC236}">
+                <a16:creationId xmlns:a16="http://schemas.microsoft.com/office/drawing/2014/main" id="{66FBEBD4-5866-3A4E-3DFC-BF37FEEB6FC4}"/>
+              </a:ext>
+            </a:extLst>
+          </p:cNvPr>
+          <p:cNvSpPr>
+            <a:spLocks noGrp="1"/>
+          </p:cNvSpPr>
+          <p:nvPr>
+            <p:ph type="title"/>
+          </p:nvPr>
+        </p:nvSpPr>
+        <p:spPr>
+          <a:xfrm>
+            <a:off x="167951" y="365124"/>
+            <a:ext cx="11877869" cy="540000"/>
+          </a:xfrm>
+        </p:spPr>
+        <p:txBody>
+          <a:bodyPr>
+            <a:normAutofit/>
+          </a:bodyPr>
+          <a:lstStyle/>
+          <a:p>
+            <a:r>
+              <a:rPr lang="ja-JP" altLang="en-US" dirty="0"/>
+              <a:t>研修の全体像について</a:t>
+            </a:r>
+          </a:p>
+        </p:txBody>
+      </p:sp>
     </p:spTree>
     <p:extLst>
       <p:ext uri="{BB962C8B-B14F-4D97-AF65-F5344CB8AC3E}">
@@ -5774,91 +5815,83 @@
               <a:tabLst/>
               <a:defRPr/>
             </a:pPr>
-            <a:r>
-              <a:rPr lang="ja-JP" altLang="en-US" dirty="0">
-                <a:solidFill>
-                  <a:srgbClr val="070F26"/>
-                </a:solidFill>
-                <a:latin typeface="Meiryo UI"/>
-                <a:ea typeface="Meiryo UI"/>
-              </a:rPr>
-              <a:t>生成</a:t>
-            </a:r>
-            <a:r>
-              <a:rPr lang="en-US" altLang="ja-JP" dirty="0">
-                <a:solidFill>
-                  <a:srgbClr val="070F26"/>
-                </a:solidFill>
-                <a:latin typeface="Meiryo UI"/>
-                <a:ea typeface="Meiryo UI"/>
-              </a:rPr>
-              <a:t>AI</a:t>
-            </a:r>
-            <a:r>
-              <a:rPr kumimoji="1" lang="ja-JP" altLang="en-US" sz="2600" b="1" i="0" u="none" strike="noStrike" kern="1200" cap="none" spc="0" normalizeH="0" baseline="0" noProof="0" dirty="0">
-                <a:ln>
-                  <a:noFill/>
-                </a:ln>
-                <a:solidFill>
-                  <a:srgbClr val="070F26"/>
-                </a:solidFill>
-                <a:effectLst/>
-                <a:uLnTx/>
-                <a:uFillTx/>
-                <a:latin typeface="Meiryo UI"/>
-                <a:ea typeface="Meiryo UI"/>
-              </a:rPr>
-              <a:t>の</a:t>
-            </a:r>
-            <a:r>
-              <a:rPr lang="ja-JP" altLang="en-US" dirty="0">
-                <a:solidFill>
-                  <a:srgbClr val="070F26"/>
-                </a:solidFill>
-                <a:latin typeface="Meiryo UI"/>
-                <a:ea typeface="Meiryo UI"/>
-              </a:rPr>
-              <a:t>活用</a:t>
-            </a:r>
-            <a:r>
-              <a:rPr kumimoji="1" lang="ja-JP" altLang="en-US" sz="2600" b="1" i="0" u="none" strike="noStrike" kern="1200" cap="none" spc="0" normalizeH="0" baseline="0" noProof="0" dirty="0">
-                <a:ln>
-                  <a:noFill/>
-                </a:ln>
-                <a:solidFill>
-                  <a:srgbClr val="070F26"/>
-                </a:solidFill>
-                <a:effectLst/>
-                <a:uLnTx/>
-                <a:uFillTx/>
-                <a:latin typeface="Meiryo UI"/>
-                <a:ea typeface="Meiryo UI"/>
-              </a:rPr>
-              <a:t>について</a:t>
-            </a:r>
-          </a:p>
-        </p:txBody>
-      </p:sp>
-      <p:sp>
-        <p:nvSpPr>
-          <p:cNvPr id="3" name="コンテンツ プレースホルダー 2">
-            <a:extLst>
-              <a:ext uri="{FF2B5EF4-FFF2-40B4-BE49-F238E27FC236}">
-                <a16:creationId xmlns:a16="http://schemas.microsoft.com/office/drawing/2014/main" id="{E81E1B53-BA70-0D2F-2098-F90A92482755}"/>
-              </a:ext>
-            </a:extLst>
-          </p:cNvPr>
-          <p:cNvSpPr>
-            <a:spLocks noGrp="1"/>
-          </p:cNvSpPr>
-          <p:nvPr>
-            <p:ph idx="1"/>
+            <a:endParaRPr kumimoji="1" lang="ja-JP" altLang="en-US" sz="2600" b="1" i="0" u="none" strike="noStrike" kern="1200" cap="none" spc="0" normalizeH="0" baseline="0" noProof="0" dirty="0">
+              <a:ln>
+                <a:noFill/>
+              </a:ln>
+              <a:solidFill>
+                <a:srgbClr val="070F26"/>
+              </a:solidFill>
+              <a:effectLst/>
+              <a:uLnTx/>
+              <a:uFillTx/>
+              <a:latin typeface="Meiryo UI"/>
+              <a:ea typeface="Meiryo UI"/>
+            </a:endParaRPr>
+          </a:p>
+        </p:txBody>
+      </p:sp>
+      <p:sp>
+        <p:nvSpPr>
+          <p:cNvPr id="5" name="タイトル 4">
+            <a:extLst>
+              <a:ext uri="{FF2B5EF4-FFF2-40B4-BE49-F238E27FC236}">
+                <a16:creationId xmlns:a16="http://schemas.microsoft.com/office/drawing/2014/main" id="{8C04943A-BD09-50E6-7BF0-434A645F3AC1}"/>
+              </a:ext>
+            </a:extLst>
+          </p:cNvPr>
+          <p:cNvSpPr>
+            <a:spLocks noGrp="1"/>
+          </p:cNvSpPr>
+          <p:nvPr>
+            <p:ph type="title"/>
           </p:nvPr>
         </p:nvSpPr>
         <p:spPr>
           <a:xfrm>
-            <a:off x="838200" y="914400"/>
-            <a:ext cx="7920000" cy="5242685"/>
+            <a:off x="167951" y="365124"/>
+            <a:ext cx="11877869" cy="540000"/>
+          </a:xfrm>
+        </p:spPr>
+        <p:txBody>
+          <a:bodyPr/>
+          <a:lstStyle/>
+          <a:p>
+            <a:r>
+              <a:rPr lang="ja-JP" altLang="en-US" dirty="0"/>
+              <a:t>生成</a:t>
+            </a:r>
+            <a:r>
+              <a:rPr lang="en-US" altLang="ja-JP" dirty="0"/>
+              <a:t>AI</a:t>
+            </a:r>
+            <a:r>
+              <a:rPr lang="ja-JP" altLang="en-US" dirty="0"/>
+              <a:t>の活用について</a:t>
+            </a:r>
+          </a:p>
+        </p:txBody>
+      </p:sp>
+      <p:sp>
+        <p:nvSpPr>
+          <p:cNvPr id="3" name="コンテンツ プレースホルダー 2">
+            <a:extLst>
+              <a:ext uri="{FF2B5EF4-FFF2-40B4-BE49-F238E27FC236}">
+                <a16:creationId xmlns:a16="http://schemas.microsoft.com/office/drawing/2014/main" id="{E81E1B53-BA70-0D2F-2098-F90A92482755}"/>
+              </a:ext>
+            </a:extLst>
+          </p:cNvPr>
+          <p:cNvSpPr>
+            <a:spLocks noGrp="1"/>
+          </p:cNvSpPr>
+          <p:nvPr>
+            <p:ph idx="1"/>
+          </p:nvPr>
+        </p:nvSpPr>
+        <p:spPr>
+          <a:xfrm>
+            <a:off x="168275" y="1073150"/>
+            <a:ext cx="11877675" cy="5103813"/>
           </a:xfrm>
         </p:spPr>
         <p:txBody>
@@ -5882,10 +5915,7 @@
             <a:endParaRPr lang="en-US" altLang="ja-JP" dirty="0"/>
           </a:p>
           <a:p>
-            <a:pPr marL="914400" lvl="1" indent="-457200">
-              <a:buFont typeface="+mj-lt"/>
-              <a:buAutoNum type="arabicPeriod"/>
-            </a:pPr>
+            <a:pPr lvl="1"/>
             <a:r>
               <a:rPr lang="ja-JP" altLang="en-US" dirty="0"/>
               <a:t>講義</a:t>
@@ -5941,10 +5971,7 @@
             <a:endParaRPr lang="en-US" altLang="ja-JP" dirty="0"/>
           </a:p>
           <a:p>
-            <a:pPr marL="914400" lvl="1" indent="-457200">
-              <a:buFont typeface="+mj-lt"/>
-              <a:buAutoNum type="arabicPeriod"/>
-            </a:pPr>
+            <a:pPr lvl="1"/>
             <a:r>
               <a:rPr lang="ja-JP" altLang="en-US" dirty="0"/>
               <a:t>演習</a:t>

--- a/00_オリエンテーション/【AI Native研修-生成AI】研修の概要.pptx
+++ b/00_オリエンテーション/【AI Native研修-生成AI】研修の概要.pptx
@@ -5915,7 +5915,10 @@
             <a:endParaRPr lang="en-US" altLang="ja-JP" dirty="0"/>
           </a:p>
           <a:p>
-            <a:pPr lvl="1"/>
+            <a:pPr marL="914400" lvl="1" indent="-457200">
+              <a:buFont typeface="+mj-lt"/>
+              <a:buAutoNum type="arabicPeriod"/>
+            </a:pPr>
             <a:r>
               <a:rPr lang="ja-JP" altLang="en-US" dirty="0"/>
               <a:t>講義</a:t>
@@ -5966,12 +5969,22 @@
             </a:r>
             <a:r>
               <a:rPr lang="ja-JP" altLang="en-US" dirty="0"/>
-              <a:t>の活用方法を学習する。</a:t>
+              <a:t>の活用方法を学習し、</a:t>
+            </a:r>
+            <a:br>
+              <a:rPr lang="en-US" altLang="ja-JP" dirty="0"/>
+            </a:br>
+            <a:r>
+              <a:rPr lang="ja-JP" altLang="en-US" dirty="0"/>
+              <a:t>その後の演習に必要な操作方法を習得する。</a:t>
             </a:r>
             <a:endParaRPr lang="en-US" altLang="ja-JP" dirty="0"/>
           </a:p>
           <a:p>
-            <a:pPr lvl="1"/>
+            <a:pPr marL="914400" lvl="1" indent="-457200">
+              <a:buFont typeface="+mj-lt"/>
+              <a:buAutoNum type="arabicPeriod"/>
+            </a:pPr>
             <a:r>
               <a:rPr lang="ja-JP" altLang="en-US" dirty="0"/>
               <a:t>演習</a:t>

--- a/00_オリエンテーション/【AI Native研修-生成AI】研修の概要.pptx
+++ b/00_オリエンテーション/【AI Native研修-生成AI】研修の概要.pptx
@@ -5291,270 +5291,6 @@
       </p:sp>
       <p:sp>
         <p:nvSpPr>
-          <p:cNvPr id="10" name="矢印: 下 9">
-            <a:extLst>
-              <a:ext uri="{FF2B5EF4-FFF2-40B4-BE49-F238E27FC236}">
-                <a16:creationId xmlns:a16="http://schemas.microsoft.com/office/drawing/2014/main" id="{A31108A4-895E-8CDC-2DB0-960DF401D9F3}"/>
-              </a:ext>
-            </a:extLst>
-          </p:cNvPr>
-          <p:cNvSpPr/>
-          <p:nvPr/>
-        </p:nvSpPr>
-        <p:spPr>
-          <a:xfrm>
-            <a:off x="1954202" y="3495137"/>
-            <a:ext cx="360000" cy="180000"/>
-          </a:xfrm>
-          <a:prstGeom prst="downArrow">
-            <a:avLst/>
-          </a:prstGeom>
-          <a:solidFill>
-            <a:schemeClr val="bg1"/>
-          </a:solidFill>
-          <a:ln w="3175" cap="flat" cmpd="sng" algn="ctr">
-            <a:solidFill>
-              <a:srgbClr val="000000"/>
-            </a:solidFill>
-            <a:prstDash val="solid"/>
-          </a:ln>
-          <a:effectLst/>
-        </p:spPr>
-        <p:txBody>
-          <a:bodyPr rot="0" spcFirstLastPara="0" vertOverflow="overflow" horzOverflow="overflow" vert="horz" wrap="square" lIns="36000" tIns="36000" rIns="36000" bIns="36000" numCol="1" spcCol="0" rtlCol="0" fromWordArt="0" anchor="ctr" anchorCtr="0" forceAA="0" compatLnSpc="1">
-            <a:prstTxWarp prst="textNoShape">
-              <a:avLst/>
-            </a:prstTxWarp>
-            <a:noAutofit/>
-          </a:bodyPr>
-          <a:lstStyle/>
-          <a:p>
-            <a:pPr marL="0" marR="0" lvl="0" indent="0" algn="ctr" defTabSz="914400" eaLnBrk="1" fontAlgn="auto" latinLnBrk="0" hangingPunct="1">
-              <a:lnSpc>
-                <a:spcPct val="100000"/>
-              </a:lnSpc>
-              <a:spcBef>
-                <a:spcPts val="0"/>
-              </a:spcBef>
-              <a:spcAft>
-                <a:spcPts val="0"/>
-              </a:spcAft>
-              <a:buClrTx/>
-              <a:buSzTx/>
-              <a:buFontTx/>
-              <a:buNone/>
-              <a:tabLst/>
-              <a:defRPr/>
-            </a:pPr>
-            <a:endParaRPr kumimoji="0" lang="ja-JP" altLang="en-US" sz="1400" b="0" i="0" u="none" strike="noStrike" kern="0" cap="none" spc="0" normalizeH="0" baseline="0" noProof="0" err="1">
-              <a:ln>
-                <a:noFill/>
-              </a:ln>
-              <a:solidFill>
-                <a:srgbClr val="000000"/>
-              </a:solidFill>
-              <a:effectLst/>
-              <a:uLnTx/>
-              <a:uFillTx/>
-              <a:latin typeface="Arial"/>
-              <a:ea typeface="Meiryo UI"/>
-              <a:cs typeface="+mn-cs"/>
-            </a:endParaRPr>
-          </a:p>
-        </p:txBody>
-      </p:sp>
-      <p:grpSp>
-        <p:nvGrpSpPr>
-          <p:cNvPr id="11" name="グループ化 10">
-            <a:extLst>
-              <a:ext uri="{FF2B5EF4-FFF2-40B4-BE49-F238E27FC236}">
-                <a16:creationId xmlns:a16="http://schemas.microsoft.com/office/drawing/2014/main" id="{2B1FB7FF-01FC-E1A7-ED5C-206BE6C4DB95}"/>
-              </a:ext>
-            </a:extLst>
-          </p:cNvPr>
-          <p:cNvGrpSpPr/>
-          <p:nvPr/>
-        </p:nvGrpSpPr>
-        <p:grpSpPr>
-          <a:xfrm>
-            <a:off x="334202" y="3925209"/>
-            <a:ext cx="3600000" cy="936522"/>
-            <a:chOff x="946296" y="5714099"/>
-            <a:chExt cx="4359349" cy="936522"/>
-          </a:xfrm>
-        </p:grpSpPr>
-        <p:sp>
-          <p:nvSpPr>
-            <p:cNvPr id="12" name="正方形/長方形 11">
-              <a:extLst>
-                <a:ext uri="{FF2B5EF4-FFF2-40B4-BE49-F238E27FC236}">
-                  <a16:creationId xmlns:a16="http://schemas.microsoft.com/office/drawing/2014/main" id="{DA46742C-C89B-18DD-6746-1B592EB92845}"/>
-                </a:ext>
-              </a:extLst>
-            </p:cNvPr>
-            <p:cNvSpPr/>
-            <p:nvPr/>
-          </p:nvSpPr>
-          <p:spPr>
-            <a:xfrm>
-              <a:off x="946296" y="5714099"/>
-              <a:ext cx="4359349" cy="304800"/>
-            </a:xfrm>
-            <a:prstGeom prst="rect">
-              <a:avLst/>
-            </a:prstGeom>
-            <a:solidFill>
-              <a:srgbClr val="FFFF00"/>
-            </a:solidFill>
-            <a:ln w="3175" cap="flat" cmpd="sng" algn="ctr">
-              <a:solidFill>
-                <a:srgbClr val="000000"/>
-              </a:solidFill>
-              <a:prstDash val="solid"/>
-            </a:ln>
-            <a:effectLst/>
-          </p:spPr>
-          <p:txBody>
-            <a:bodyPr rot="0" spcFirstLastPara="0" vertOverflow="overflow" horzOverflow="overflow" vert="horz" wrap="square" lIns="36000" tIns="36000" rIns="36000" bIns="36000" numCol="1" spcCol="0" rtlCol="0" fromWordArt="0" anchor="ctr" anchorCtr="0" forceAA="0" compatLnSpc="1">
-              <a:prstTxWarp prst="textNoShape">
-                <a:avLst/>
-              </a:prstTxWarp>
-              <a:noAutofit/>
-            </a:bodyPr>
-            <a:lstStyle/>
-            <a:p>
-              <a:pPr lvl="0" algn="ctr"/>
-              <a:r>
-                <a:rPr kumimoji="0" lang="ja-JP" altLang="en-US" kern="0" dirty="0">
-                  <a:solidFill>
-                    <a:srgbClr val="000000"/>
-                  </a:solidFill>
-                  <a:latin typeface="Arial"/>
-                  <a:ea typeface="Meiryo UI"/>
-                </a:rPr>
-                <a:t>アプリケーション</a:t>
-              </a:r>
-              <a:endParaRPr kumimoji="0" lang="ja-JP" altLang="en-US" b="0" i="0" u="none" strike="noStrike" kern="0" cap="none" spc="0" normalizeH="0" baseline="0" noProof="0" dirty="0">
-                <a:ln>
-                  <a:noFill/>
-                </a:ln>
-                <a:solidFill>
-                  <a:srgbClr val="000000"/>
-                </a:solidFill>
-                <a:effectLst/>
-                <a:uLnTx/>
-                <a:uFillTx/>
-                <a:latin typeface="Arial"/>
-                <a:ea typeface="Meiryo UI"/>
-                <a:cs typeface="+mn-cs"/>
-              </a:endParaRPr>
-            </a:p>
-          </p:txBody>
-        </p:sp>
-        <p:sp>
-          <p:nvSpPr>
-            <p:cNvPr id="13" name="正方形/長方形 12">
-              <a:extLst>
-                <a:ext uri="{FF2B5EF4-FFF2-40B4-BE49-F238E27FC236}">
-                  <a16:creationId xmlns:a16="http://schemas.microsoft.com/office/drawing/2014/main" id="{D266BAC1-DD2E-1050-649C-4FBE5B13608B}"/>
-                </a:ext>
-              </a:extLst>
-            </p:cNvPr>
-            <p:cNvSpPr/>
-            <p:nvPr/>
-          </p:nvSpPr>
-          <p:spPr>
-            <a:xfrm>
-              <a:off x="946296" y="6018899"/>
-              <a:ext cx="4359349" cy="631722"/>
-            </a:xfrm>
-            <a:prstGeom prst="rect">
-              <a:avLst/>
-            </a:prstGeom>
-            <a:solidFill>
-              <a:srgbClr val="FFFFFF"/>
-            </a:solidFill>
-            <a:ln w="3175" cap="flat" cmpd="sng" algn="ctr">
-              <a:solidFill>
-                <a:srgbClr val="000000"/>
-              </a:solidFill>
-              <a:prstDash val="solid"/>
-            </a:ln>
-            <a:effectLst/>
-          </p:spPr>
-          <p:txBody>
-            <a:bodyPr rot="0" spcFirstLastPara="0" vertOverflow="overflow" horzOverflow="overflow" vert="horz" wrap="square" lIns="36000" tIns="36000" rIns="36000" bIns="36000" numCol="1" spcCol="0" rtlCol="0" fromWordArt="0" anchor="ctr" anchorCtr="0" forceAA="0" compatLnSpc="1">
-              <a:prstTxWarp prst="textNoShape">
-                <a:avLst/>
-              </a:prstTxWarp>
-              <a:noAutofit/>
-            </a:bodyPr>
-            <a:lstStyle/>
-            <a:p>
-              <a:pPr marL="0" marR="0" lvl="0" indent="0" defTabSz="914400" eaLnBrk="1" fontAlgn="auto" latinLnBrk="0" hangingPunct="1">
-                <a:lnSpc>
-                  <a:spcPct val="100000"/>
-                </a:lnSpc>
-                <a:spcBef>
-                  <a:spcPts val="0"/>
-                </a:spcBef>
-                <a:spcAft>
-                  <a:spcPts val="0"/>
-                </a:spcAft>
-                <a:buClrTx/>
-                <a:buSzTx/>
-                <a:buFontTx/>
-                <a:buNone/>
-                <a:tabLst/>
-                <a:defRPr/>
-              </a:pPr>
-              <a:r>
-                <a:rPr kumimoji="0" lang="ja-JP" altLang="en-US" sz="1200" b="0" i="0" u="none" strike="noStrike" kern="0" cap="none" spc="0" normalizeH="0" baseline="0" noProof="0" dirty="0">
-                  <a:ln>
-                    <a:noFill/>
-                  </a:ln>
-                  <a:solidFill>
-                    <a:srgbClr val="000000"/>
-                  </a:solidFill>
-                  <a:effectLst/>
-                  <a:uLnTx/>
-                  <a:uFillTx/>
-                  <a:latin typeface="Arial"/>
-                  <a:ea typeface="Meiryo UI"/>
-                  <a:cs typeface="+mn-cs"/>
-                </a:rPr>
-                <a:t>・</a:t>
-              </a:r>
-              <a:r>
-                <a:rPr kumimoji="0" lang="ja-JP" altLang="en-US" sz="1200" kern="0" dirty="0">
-                  <a:solidFill>
-                    <a:srgbClr val="000000"/>
-                  </a:solidFill>
-                  <a:latin typeface="Arial"/>
-                  <a:ea typeface="Meiryo UI"/>
-                </a:rPr>
-                <a:t>任意</a:t>
-              </a:r>
-              <a:endParaRPr kumimoji="0" lang="en-US" altLang="ja-JP" sz="1200" b="0" i="0" u="none" strike="noStrike" kern="0" cap="none" spc="0" normalizeH="0" baseline="0" noProof="0" dirty="0">
-                <a:ln>
-                  <a:noFill/>
-                </a:ln>
-                <a:solidFill>
-                  <a:srgbClr val="000000"/>
-                </a:solidFill>
-                <a:effectLst/>
-                <a:uLnTx/>
-                <a:uFillTx/>
-                <a:latin typeface="Arial"/>
-                <a:ea typeface="Meiryo UI"/>
-                <a:cs typeface="+mn-cs"/>
-              </a:endParaRPr>
-            </a:p>
-          </p:txBody>
-        </p:sp>
-      </p:grpSp>
-      <p:sp>
-        <p:nvSpPr>
           <p:cNvPr id="2" name="タイトル 1">
             <a:extLst>
               <a:ext uri="{FF2B5EF4-FFF2-40B4-BE49-F238E27FC236}">
@@ -6011,10 +5747,10 @@
       </p:sp>
       <p:pic>
         <p:nvPicPr>
-          <p:cNvPr id="4" name="図 3">
-            <a:extLst>
-              <a:ext uri="{FF2B5EF4-FFF2-40B4-BE49-F238E27FC236}">
-                <a16:creationId xmlns:a16="http://schemas.microsoft.com/office/drawing/2014/main" id="{7F6E940B-03B0-E0EC-8269-0AA35D5E5B19}"/>
+          <p:cNvPr id="6" name="図 5">
+            <a:extLst>
+              <a:ext uri="{FF2B5EF4-FFF2-40B4-BE49-F238E27FC236}">
+                <a16:creationId xmlns:a16="http://schemas.microsoft.com/office/drawing/2014/main" id="{531BB476-0617-2BE4-9AB4-E5F799088C68}"/>
               </a:ext>
             </a:extLst>
           </p:cNvPr>
@@ -6031,8 +5767,8 @@
         </p:blipFill>
         <p:spPr>
           <a:xfrm>
-            <a:off x="9298800" y="730800"/>
-            <a:ext cx="2520000" cy="2268419"/>
+            <a:off x="8420677" y="1073150"/>
+            <a:ext cx="3603048" cy="1688738"/>
           </a:xfrm>
           <a:prstGeom prst="rect">
             <a:avLst/>

--- a/00_オリエンテーション/【AI Native研修-生成AI】研修の概要.pptx
+++ b/00_オリエンテーション/【AI Native研修-生成AI】研修の概要.pptx
@@ -8,9 +8,9 @@
     <p:notesMasterId r:id="rId5"/>
   </p:notesMasterIdLst>
   <p:sldIdLst>
-    <p:sldId id="256" r:id="rId2"/>
-    <p:sldId id="257" r:id="rId3"/>
-    <p:sldId id="258" r:id="rId4"/>
+    <p:sldId id="262" r:id="rId2"/>
+    <p:sldId id="263" r:id="rId3"/>
+    <p:sldId id="264" r:id="rId4"/>
   </p:sldIdLst>
   <p:sldSz cx="12192000" cy="6858000"/>
   <p:notesSz cx="6858000" cy="9144000"/>
@@ -816,64 +816,10 @@
       </p:sp>
       <p:sp>
         <p:nvSpPr>
-          <p:cNvPr id="4" name="日付プレースホルダー 3">
+          <p:cNvPr id="9" name="スライド番号プレースホルダー 8">
             <a:extLst>
               <a:ext uri="{FF2B5EF4-FFF2-40B4-BE49-F238E27FC236}">
-                <a16:creationId xmlns:a16="http://schemas.microsoft.com/office/drawing/2014/main" id="{FFE4C389-7303-F6E2-A905-B7D704D1F620}"/>
-              </a:ext>
-            </a:extLst>
-          </p:cNvPr>
-          <p:cNvSpPr>
-            <a:spLocks noGrp="1"/>
-          </p:cNvSpPr>
-          <p:nvPr>
-            <p:ph type="dt" sz="half" idx="10"/>
-          </p:nvPr>
-        </p:nvSpPr>
-        <p:spPr/>
-        <p:txBody>
-          <a:bodyPr/>
-          <a:lstStyle/>
-          <a:p>
-            <a:fld id="{E3EFBC31-9ECA-48C0-910F-E09377915FB8}" type="datetimeFigureOut">
-              <a:rPr kumimoji="1" lang="ja-JP" altLang="en-US" smtClean="0"/>
-              <a:t>2026/7/5</a:t>
-            </a:fld>
-            <a:endParaRPr kumimoji="1" lang="ja-JP" altLang="en-US"/>
-          </a:p>
-        </p:txBody>
-      </p:sp>
-      <p:sp>
-        <p:nvSpPr>
-          <p:cNvPr id="5" name="フッター プレースホルダー 4">
-            <a:extLst>
-              <a:ext uri="{FF2B5EF4-FFF2-40B4-BE49-F238E27FC236}">
-                <a16:creationId xmlns:a16="http://schemas.microsoft.com/office/drawing/2014/main" id="{2CA5D6D8-D495-753D-963F-D2031F5490DC}"/>
-              </a:ext>
-            </a:extLst>
-          </p:cNvPr>
-          <p:cNvSpPr>
-            <a:spLocks noGrp="1"/>
-          </p:cNvSpPr>
-          <p:nvPr>
-            <p:ph type="ftr" sz="quarter" idx="11"/>
-          </p:nvPr>
-        </p:nvSpPr>
-        <p:spPr/>
-        <p:txBody>
-          <a:bodyPr/>
-          <a:lstStyle/>
-          <a:p>
-            <a:endParaRPr kumimoji="1" lang="ja-JP" altLang="en-US"/>
-          </a:p>
-        </p:txBody>
-      </p:sp>
-      <p:sp>
-        <p:nvSpPr>
-          <p:cNvPr id="6" name="スライド番号プレースホルダー 5">
-            <a:extLst>
-              <a:ext uri="{FF2B5EF4-FFF2-40B4-BE49-F238E27FC236}">
-                <a16:creationId xmlns:a16="http://schemas.microsoft.com/office/drawing/2014/main" id="{06B97719-44F6-07B6-2299-44CDBEF7F25E}"/>
+                <a16:creationId xmlns:a16="http://schemas.microsoft.com/office/drawing/2014/main" id="{7B0E450B-CE2B-C31B-FDFE-065FEE3F092C}"/>
               </a:ext>
             </a:extLst>
           </p:cNvPr>
@@ -884,16 +830,26 @@
             <p:ph type="sldNum" sz="quarter" idx="12"/>
           </p:nvPr>
         </p:nvSpPr>
-        <p:spPr/>
+        <p:spPr>
+          <a:xfrm>
+            <a:off x="8610600" y="6421667"/>
+            <a:ext cx="2743200" cy="365125"/>
+          </a:xfrm>
+        </p:spPr>
         <p:txBody>
           <a:bodyPr/>
-          <a:lstStyle/>
+          <a:lstStyle>
+            <a:lvl1pPr>
+              <a:defRPr sz="800"/>
+            </a:lvl1pPr>
+          </a:lstStyle>
           <a:p>
             <a:fld id="{9EBFBC76-F46F-4ADD-8228-9529630895ED}" type="slidenum">
-              <a:rPr kumimoji="1" lang="ja-JP" altLang="en-US" smtClean="0"/>
+              <a:rPr lang="ja-JP" altLang="en-US" smtClean="0"/>
+              <a:pPr/>
               <a:t>‹#›</a:t>
             </a:fld>
-            <a:endParaRPr kumimoji="1" lang="ja-JP" altLang="en-US"/>
+            <a:endParaRPr lang="ja-JP" altLang="en-US" dirty="0"/>
           </a:p>
         </p:txBody>
       </p:sp>
@@ -901,476 +857,6 @@
     <p:extLst>
       <p:ext uri="{BB962C8B-B14F-4D97-AF65-F5344CB8AC3E}">
         <p14:creationId xmlns:p14="http://schemas.microsoft.com/office/powerpoint/2010/main" val="2975453224"/>
-      </p:ext>
-    </p:extLst>
-  </p:cSld>
-  <p:clrMapOvr>
-    <a:masterClrMapping/>
-  </p:clrMapOvr>
-</p:sldLayout>
-</file>
-
-<file path=ppt/slideLayouts/slideLayout10.xml><?xml version="1.0" encoding="utf-8"?>
-<p:sldLayout xmlns:a="http://schemas.openxmlformats.org/drawingml/2006/main" xmlns:r="http://schemas.openxmlformats.org/officeDocument/2006/relationships" xmlns:p="http://schemas.openxmlformats.org/presentationml/2006/main" type="vertTx" preserve="1">
-  <p:cSld name="タイトルと縦書きテキスト">
-    <p:spTree>
-      <p:nvGrpSpPr>
-        <p:cNvPr id="1" name=""/>
-        <p:cNvGrpSpPr/>
-        <p:nvPr/>
-      </p:nvGrpSpPr>
-      <p:grpSpPr>
-        <a:xfrm>
-          <a:off x="0" y="0"/>
-          <a:ext cx="0" cy="0"/>
-          <a:chOff x="0" y="0"/>
-          <a:chExt cx="0" cy="0"/>
-        </a:xfrm>
-      </p:grpSpPr>
-      <p:sp>
-        <p:nvSpPr>
-          <p:cNvPr id="2" name="タイトル 1">
-            <a:extLst>
-              <a:ext uri="{FF2B5EF4-FFF2-40B4-BE49-F238E27FC236}">
-                <a16:creationId xmlns:a16="http://schemas.microsoft.com/office/drawing/2014/main" id="{B3D948F8-A898-A22B-7EF3-84E85241D754}"/>
-              </a:ext>
-            </a:extLst>
-          </p:cNvPr>
-          <p:cNvSpPr>
-            <a:spLocks noGrp="1"/>
-          </p:cNvSpPr>
-          <p:nvPr>
-            <p:ph type="title"/>
-          </p:nvPr>
-        </p:nvSpPr>
-        <p:spPr/>
-        <p:txBody>
-          <a:bodyPr/>
-          <a:lstStyle/>
-          <a:p>
-            <a:r>
-              <a:rPr kumimoji="1" lang="ja-JP" altLang="en-US"/>
-              <a:t>マスター タイトルの書式設定</a:t>
-            </a:r>
-          </a:p>
-        </p:txBody>
-      </p:sp>
-      <p:sp>
-        <p:nvSpPr>
-          <p:cNvPr id="3" name="縦書きテキスト プレースホルダー 2">
-            <a:extLst>
-              <a:ext uri="{FF2B5EF4-FFF2-40B4-BE49-F238E27FC236}">
-                <a16:creationId xmlns:a16="http://schemas.microsoft.com/office/drawing/2014/main" id="{EDB9CE3F-DD4B-FBB0-0358-E359990CFAE5}"/>
-              </a:ext>
-            </a:extLst>
-          </p:cNvPr>
-          <p:cNvSpPr>
-            <a:spLocks noGrp="1"/>
-          </p:cNvSpPr>
-          <p:nvPr>
-            <p:ph type="body" orient="vert" idx="1"/>
-          </p:nvPr>
-        </p:nvSpPr>
-        <p:spPr/>
-        <p:txBody>
-          <a:bodyPr vert="eaVert"/>
-          <a:lstStyle/>
-          <a:p>
-            <a:pPr lvl="0"/>
-            <a:r>
-              <a:rPr kumimoji="1" lang="ja-JP" altLang="en-US"/>
-              <a:t>マスター テキストの書式設定</a:t>
-            </a:r>
-          </a:p>
-          <a:p>
-            <a:pPr lvl="1"/>
-            <a:r>
-              <a:rPr kumimoji="1" lang="ja-JP" altLang="en-US"/>
-              <a:t>第 </a:t>
-            </a:r>
-            <a:r>
-              <a:rPr kumimoji="1" lang="en-US" altLang="ja-JP"/>
-              <a:t>2 </a:t>
-            </a:r>
-            <a:r>
-              <a:rPr kumimoji="1" lang="ja-JP" altLang="en-US"/>
-              <a:t>レベル</a:t>
-            </a:r>
-          </a:p>
-          <a:p>
-            <a:pPr lvl="2"/>
-            <a:r>
-              <a:rPr kumimoji="1" lang="ja-JP" altLang="en-US"/>
-              <a:t>第 </a:t>
-            </a:r>
-            <a:r>
-              <a:rPr kumimoji="1" lang="en-US" altLang="ja-JP"/>
-              <a:t>3 </a:t>
-            </a:r>
-            <a:r>
-              <a:rPr kumimoji="1" lang="ja-JP" altLang="en-US"/>
-              <a:t>レベル</a:t>
-            </a:r>
-          </a:p>
-          <a:p>
-            <a:pPr lvl="3"/>
-            <a:r>
-              <a:rPr kumimoji="1" lang="ja-JP" altLang="en-US"/>
-              <a:t>第 </a:t>
-            </a:r>
-            <a:r>
-              <a:rPr kumimoji="1" lang="en-US" altLang="ja-JP"/>
-              <a:t>4 </a:t>
-            </a:r>
-            <a:r>
-              <a:rPr kumimoji="1" lang="ja-JP" altLang="en-US"/>
-              <a:t>レベル</a:t>
-            </a:r>
-          </a:p>
-          <a:p>
-            <a:pPr lvl="4"/>
-            <a:r>
-              <a:rPr kumimoji="1" lang="ja-JP" altLang="en-US"/>
-              <a:t>第 </a:t>
-            </a:r>
-            <a:r>
-              <a:rPr kumimoji="1" lang="en-US" altLang="ja-JP"/>
-              <a:t>5 </a:t>
-            </a:r>
-            <a:r>
-              <a:rPr kumimoji="1" lang="ja-JP" altLang="en-US"/>
-              <a:t>レベル</a:t>
-            </a:r>
-          </a:p>
-        </p:txBody>
-      </p:sp>
-      <p:sp>
-        <p:nvSpPr>
-          <p:cNvPr id="4" name="日付プレースホルダー 3">
-            <a:extLst>
-              <a:ext uri="{FF2B5EF4-FFF2-40B4-BE49-F238E27FC236}">
-                <a16:creationId xmlns:a16="http://schemas.microsoft.com/office/drawing/2014/main" id="{D8A1EFE8-83F8-C673-6466-09628A8801F9}"/>
-              </a:ext>
-            </a:extLst>
-          </p:cNvPr>
-          <p:cNvSpPr>
-            <a:spLocks noGrp="1"/>
-          </p:cNvSpPr>
-          <p:nvPr>
-            <p:ph type="dt" sz="half" idx="10"/>
-          </p:nvPr>
-        </p:nvSpPr>
-        <p:spPr/>
-        <p:txBody>
-          <a:bodyPr/>
-          <a:lstStyle/>
-          <a:p>
-            <a:fld id="{E3EFBC31-9ECA-48C0-910F-E09377915FB8}" type="datetimeFigureOut">
-              <a:rPr kumimoji="1" lang="ja-JP" altLang="en-US" smtClean="0"/>
-              <a:t>2026/7/5</a:t>
-            </a:fld>
-            <a:endParaRPr kumimoji="1" lang="ja-JP" altLang="en-US"/>
-          </a:p>
-        </p:txBody>
-      </p:sp>
-      <p:sp>
-        <p:nvSpPr>
-          <p:cNvPr id="5" name="フッター プレースホルダー 4">
-            <a:extLst>
-              <a:ext uri="{FF2B5EF4-FFF2-40B4-BE49-F238E27FC236}">
-                <a16:creationId xmlns:a16="http://schemas.microsoft.com/office/drawing/2014/main" id="{18A29062-6AC9-DD4E-C20C-3568B001C141}"/>
-              </a:ext>
-            </a:extLst>
-          </p:cNvPr>
-          <p:cNvSpPr>
-            <a:spLocks noGrp="1"/>
-          </p:cNvSpPr>
-          <p:nvPr>
-            <p:ph type="ftr" sz="quarter" idx="11"/>
-          </p:nvPr>
-        </p:nvSpPr>
-        <p:spPr/>
-        <p:txBody>
-          <a:bodyPr/>
-          <a:lstStyle/>
-          <a:p>
-            <a:endParaRPr kumimoji="1" lang="ja-JP" altLang="en-US"/>
-          </a:p>
-        </p:txBody>
-      </p:sp>
-      <p:sp>
-        <p:nvSpPr>
-          <p:cNvPr id="6" name="スライド番号プレースホルダー 5">
-            <a:extLst>
-              <a:ext uri="{FF2B5EF4-FFF2-40B4-BE49-F238E27FC236}">
-                <a16:creationId xmlns:a16="http://schemas.microsoft.com/office/drawing/2014/main" id="{6FC21EC4-135A-AB14-091E-CA0A0AA389BF}"/>
-              </a:ext>
-            </a:extLst>
-          </p:cNvPr>
-          <p:cNvSpPr>
-            <a:spLocks noGrp="1"/>
-          </p:cNvSpPr>
-          <p:nvPr>
-            <p:ph type="sldNum" sz="quarter" idx="12"/>
-          </p:nvPr>
-        </p:nvSpPr>
-        <p:spPr/>
-        <p:txBody>
-          <a:bodyPr/>
-          <a:lstStyle/>
-          <a:p>
-            <a:fld id="{9EBFBC76-F46F-4ADD-8228-9529630895ED}" type="slidenum">
-              <a:rPr kumimoji="1" lang="ja-JP" altLang="en-US" smtClean="0"/>
-              <a:t>‹#›</a:t>
-            </a:fld>
-            <a:endParaRPr kumimoji="1" lang="ja-JP" altLang="en-US"/>
-          </a:p>
-        </p:txBody>
-      </p:sp>
-    </p:spTree>
-    <p:extLst>
-      <p:ext uri="{BB962C8B-B14F-4D97-AF65-F5344CB8AC3E}">
-        <p14:creationId xmlns:p14="http://schemas.microsoft.com/office/powerpoint/2010/main" val="2011069350"/>
-      </p:ext>
-    </p:extLst>
-  </p:cSld>
-  <p:clrMapOvr>
-    <a:masterClrMapping/>
-  </p:clrMapOvr>
-</p:sldLayout>
-</file>
-
-<file path=ppt/slideLayouts/slideLayout11.xml><?xml version="1.0" encoding="utf-8"?>
-<p:sldLayout xmlns:a="http://schemas.openxmlformats.org/drawingml/2006/main" xmlns:r="http://schemas.openxmlformats.org/officeDocument/2006/relationships" xmlns:p="http://schemas.openxmlformats.org/presentationml/2006/main" type="vertTitleAndTx" preserve="1">
-  <p:cSld name="縦書きタイトルと&#10;縦書きテキスト">
-    <p:spTree>
-      <p:nvGrpSpPr>
-        <p:cNvPr id="1" name=""/>
-        <p:cNvGrpSpPr/>
-        <p:nvPr/>
-      </p:nvGrpSpPr>
-      <p:grpSpPr>
-        <a:xfrm>
-          <a:off x="0" y="0"/>
-          <a:ext cx="0" cy="0"/>
-          <a:chOff x="0" y="0"/>
-          <a:chExt cx="0" cy="0"/>
-        </a:xfrm>
-      </p:grpSpPr>
-      <p:sp>
-        <p:nvSpPr>
-          <p:cNvPr id="2" name="縦書きタイトル 1">
-            <a:extLst>
-              <a:ext uri="{FF2B5EF4-FFF2-40B4-BE49-F238E27FC236}">
-                <a16:creationId xmlns:a16="http://schemas.microsoft.com/office/drawing/2014/main" id="{28A78528-6686-7717-9395-A6791781DC1D}"/>
-              </a:ext>
-            </a:extLst>
-          </p:cNvPr>
-          <p:cNvSpPr>
-            <a:spLocks noGrp="1"/>
-          </p:cNvSpPr>
-          <p:nvPr>
-            <p:ph type="title" orient="vert"/>
-          </p:nvPr>
-        </p:nvSpPr>
-        <p:spPr>
-          <a:xfrm>
-            <a:off x="8724900" y="365125"/>
-            <a:ext cx="2628900" cy="5811838"/>
-          </a:xfrm>
-        </p:spPr>
-        <p:txBody>
-          <a:bodyPr vert="eaVert"/>
-          <a:lstStyle/>
-          <a:p>
-            <a:r>
-              <a:rPr kumimoji="1" lang="ja-JP" altLang="en-US"/>
-              <a:t>マスター タイトルの書式設定</a:t>
-            </a:r>
-          </a:p>
-        </p:txBody>
-      </p:sp>
-      <p:sp>
-        <p:nvSpPr>
-          <p:cNvPr id="3" name="縦書きテキスト プレースホルダー 2">
-            <a:extLst>
-              <a:ext uri="{FF2B5EF4-FFF2-40B4-BE49-F238E27FC236}">
-                <a16:creationId xmlns:a16="http://schemas.microsoft.com/office/drawing/2014/main" id="{A8779115-C3F1-5580-1C82-172ACF121ED1}"/>
-              </a:ext>
-            </a:extLst>
-          </p:cNvPr>
-          <p:cNvSpPr>
-            <a:spLocks noGrp="1"/>
-          </p:cNvSpPr>
-          <p:nvPr>
-            <p:ph type="body" orient="vert" idx="1"/>
-          </p:nvPr>
-        </p:nvSpPr>
-        <p:spPr>
-          <a:xfrm>
-            <a:off x="838200" y="365125"/>
-            <a:ext cx="7734300" cy="5811838"/>
-          </a:xfrm>
-        </p:spPr>
-        <p:txBody>
-          <a:bodyPr vert="eaVert"/>
-          <a:lstStyle/>
-          <a:p>
-            <a:pPr lvl="0"/>
-            <a:r>
-              <a:rPr kumimoji="1" lang="ja-JP" altLang="en-US"/>
-              <a:t>マスター テキストの書式設定</a:t>
-            </a:r>
-          </a:p>
-          <a:p>
-            <a:pPr lvl="1"/>
-            <a:r>
-              <a:rPr kumimoji="1" lang="ja-JP" altLang="en-US"/>
-              <a:t>第 </a:t>
-            </a:r>
-            <a:r>
-              <a:rPr kumimoji="1" lang="en-US" altLang="ja-JP"/>
-              <a:t>2 </a:t>
-            </a:r>
-            <a:r>
-              <a:rPr kumimoji="1" lang="ja-JP" altLang="en-US"/>
-              <a:t>レベル</a:t>
-            </a:r>
-          </a:p>
-          <a:p>
-            <a:pPr lvl="2"/>
-            <a:r>
-              <a:rPr kumimoji="1" lang="ja-JP" altLang="en-US"/>
-              <a:t>第 </a:t>
-            </a:r>
-            <a:r>
-              <a:rPr kumimoji="1" lang="en-US" altLang="ja-JP"/>
-              <a:t>3 </a:t>
-            </a:r>
-            <a:r>
-              <a:rPr kumimoji="1" lang="ja-JP" altLang="en-US"/>
-              <a:t>レベル</a:t>
-            </a:r>
-          </a:p>
-          <a:p>
-            <a:pPr lvl="3"/>
-            <a:r>
-              <a:rPr kumimoji="1" lang="ja-JP" altLang="en-US"/>
-              <a:t>第 </a:t>
-            </a:r>
-            <a:r>
-              <a:rPr kumimoji="1" lang="en-US" altLang="ja-JP"/>
-              <a:t>4 </a:t>
-            </a:r>
-            <a:r>
-              <a:rPr kumimoji="1" lang="ja-JP" altLang="en-US"/>
-              <a:t>レベル</a:t>
-            </a:r>
-          </a:p>
-          <a:p>
-            <a:pPr lvl="4"/>
-            <a:r>
-              <a:rPr kumimoji="1" lang="ja-JP" altLang="en-US"/>
-              <a:t>第 </a:t>
-            </a:r>
-            <a:r>
-              <a:rPr kumimoji="1" lang="en-US" altLang="ja-JP"/>
-              <a:t>5 </a:t>
-            </a:r>
-            <a:r>
-              <a:rPr kumimoji="1" lang="ja-JP" altLang="en-US"/>
-              <a:t>レベル</a:t>
-            </a:r>
-          </a:p>
-        </p:txBody>
-      </p:sp>
-      <p:sp>
-        <p:nvSpPr>
-          <p:cNvPr id="4" name="日付プレースホルダー 3">
-            <a:extLst>
-              <a:ext uri="{FF2B5EF4-FFF2-40B4-BE49-F238E27FC236}">
-                <a16:creationId xmlns:a16="http://schemas.microsoft.com/office/drawing/2014/main" id="{7227D618-FA30-2F16-A3BA-1C48127BFE97}"/>
-              </a:ext>
-            </a:extLst>
-          </p:cNvPr>
-          <p:cNvSpPr>
-            <a:spLocks noGrp="1"/>
-          </p:cNvSpPr>
-          <p:nvPr>
-            <p:ph type="dt" sz="half" idx="10"/>
-          </p:nvPr>
-        </p:nvSpPr>
-        <p:spPr/>
-        <p:txBody>
-          <a:bodyPr/>
-          <a:lstStyle/>
-          <a:p>
-            <a:fld id="{E3EFBC31-9ECA-48C0-910F-E09377915FB8}" type="datetimeFigureOut">
-              <a:rPr kumimoji="1" lang="ja-JP" altLang="en-US" smtClean="0"/>
-              <a:t>2026/7/5</a:t>
-            </a:fld>
-            <a:endParaRPr kumimoji="1" lang="ja-JP" altLang="en-US"/>
-          </a:p>
-        </p:txBody>
-      </p:sp>
-      <p:sp>
-        <p:nvSpPr>
-          <p:cNvPr id="5" name="フッター プレースホルダー 4">
-            <a:extLst>
-              <a:ext uri="{FF2B5EF4-FFF2-40B4-BE49-F238E27FC236}">
-                <a16:creationId xmlns:a16="http://schemas.microsoft.com/office/drawing/2014/main" id="{0C6D16EA-23E0-4DB0-E96D-371B623EEC34}"/>
-              </a:ext>
-            </a:extLst>
-          </p:cNvPr>
-          <p:cNvSpPr>
-            <a:spLocks noGrp="1"/>
-          </p:cNvSpPr>
-          <p:nvPr>
-            <p:ph type="ftr" sz="quarter" idx="11"/>
-          </p:nvPr>
-        </p:nvSpPr>
-        <p:spPr/>
-        <p:txBody>
-          <a:bodyPr/>
-          <a:lstStyle/>
-          <a:p>
-            <a:endParaRPr kumimoji="1" lang="ja-JP" altLang="en-US"/>
-          </a:p>
-        </p:txBody>
-      </p:sp>
-      <p:sp>
-        <p:nvSpPr>
-          <p:cNvPr id="6" name="スライド番号プレースホルダー 5">
-            <a:extLst>
-              <a:ext uri="{FF2B5EF4-FFF2-40B4-BE49-F238E27FC236}">
-                <a16:creationId xmlns:a16="http://schemas.microsoft.com/office/drawing/2014/main" id="{1F350307-06A9-2F31-4E2F-74756A586547}"/>
-              </a:ext>
-            </a:extLst>
-          </p:cNvPr>
-          <p:cNvSpPr>
-            <a:spLocks noGrp="1"/>
-          </p:cNvSpPr>
-          <p:nvPr>
-            <p:ph type="sldNum" sz="quarter" idx="12"/>
-          </p:nvPr>
-        </p:nvSpPr>
-        <p:spPr/>
-        <p:txBody>
-          <a:bodyPr/>
-          <a:lstStyle/>
-          <a:p>
-            <a:fld id="{9EBFBC76-F46F-4ADD-8228-9529630895ED}" type="slidenum">
-              <a:rPr kumimoji="1" lang="ja-JP" altLang="en-US" smtClean="0"/>
-              <a:t>‹#›</a:t>
-            </a:fld>
-            <a:endParaRPr kumimoji="1" lang="ja-JP" altLang="en-US"/>
-          </a:p>
-        </p:txBody>
-      </p:sp>
-    </p:spTree>
-    <p:extLst>
-      <p:ext uri="{BB962C8B-B14F-4D97-AF65-F5344CB8AC3E}">
-        <p14:creationId xmlns:p14="http://schemas.microsoft.com/office/powerpoint/2010/main" val="1693637340"/>
       </p:ext>
     </p:extLst>
   </p:cSld>
@@ -1399,93 +885,10 @@
       </p:grpSpPr>
       <p:sp>
         <p:nvSpPr>
-          <p:cNvPr id="4" name="日付プレースホルダー 3">
+          <p:cNvPr id="7" name="タイトル 1">
             <a:extLst>
               <a:ext uri="{FF2B5EF4-FFF2-40B4-BE49-F238E27FC236}">
-                <a16:creationId xmlns:a16="http://schemas.microsoft.com/office/drawing/2014/main" id="{311DBD3B-56FD-917A-7F5A-3015D9774F18}"/>
-              </a:ext>
-            </a:extLst>
-          </p:cNvPr>
-          <p:cNvSpPr>
-            <a:spLocks noGrp="1"/>
-          </p:cNvSpPr>
-          <p:nvPr>
-            <p:ph type="dt" sz="half" idx="10"/>
-          </p:nvPr>
-        </p:nvSpPr>
-        <p:spPr/>
-        <p:txBody>
-          <a:bodyPr/>
-          <a:lstStyle/>
-          <a:p>
-            <a:fld id="{E3EFBC31-9ECA-48C0-910F-E09377915FB8}" type="datetimeFigureOut">
-              <a:rPr kumimoji="1" lang="ja-JP" altLang="en-US" smtClean="0"/>
-              <a:t>2026/7/5</a:t>
-            </a:fld>
-            <a:endParaRPr kumimoji="1" lang="ja-JP" altLang="en-US"/>
-          </a:p>
-        </p:txBody>
-      </p:sp>
-      <p:sp>
-        <p:nvSpPr>
-          <p:cNvPr id="5" name="フッター プレースホルダー 4">
-            <a:extLst>
-              <a:ext uri="{FF2B5EF4-FFF2-40B4-BE49-F238E27FC236}">
-                <a16:creationId xmlns:a16="http://schemas.microsoft.com/office/drawing/2014/main" id="{8F2DC64E-F29E-D854-BEF0-3070C545D5CA}"/>
-              </a:ext>
-            </a:extLst>
-          </p:cNvPr>
-          <p:cNvSpPr>
-            <a:spLocks noGrp="1"/>
-          </p:cNvSpPr>
-          <p:nvPr>
-            <p:ph type="ftr" sz="quarter" idx="11"/>
-          </p:nvPr>
-        </p:nvSpPr>
-        <p:spPr/>
-        <p:txBody>
-          <a:bodyPr/>
-          <a:lstStyle/>
-          <a:p>
-            <a:endParaRPr kumimoji="1" lang="ja-JP" altLang="en-US"/>
-          </a:p>
-        </p:txBody>
-      </p:sp>
-      <p:sp>
-        <p:nvSpPr>
-          <p:cNvPr id="6" name="スライド番号プレースホルダー 5">
-            <a:extLst>
-              <a:ext uri="{FF2B5EF4-FFF2-40B4-BE49-F238E27FC236}">
-                <a16:creationId xmlns:a16="http://schemas.microsoft.com/office/drawing/2014/main" id="{7548F59C-A5D5-E9EE-6BFB-1E812ECDBA45}"/>
-              </a:ext>
-            </a:extLst>
-          </p:cNvPr>
-          <p:cNvSpPr>
-            <a:spLocks noGrp="1"/>
-          </p:cNvSpPr>
-          <p:nvPr>
-            <p:ph type="sldNum" sz="quarter" idx="12"/>
-          </p:nvPr>
-        </p:nvSpPr>
-        <p:spPr/>
-        <p:txBody>
-          <a:bodyPr/>
-          <a:lstStyle/>
-          <a:p>
-            <a:fld id="{9EBFBC76-F46F-4ADD-8228-9529630895ED}" type="slidenum">
-              <a:rPr kumimoji="1" lang="ja-JP" altLang="en-US" smtClean="0"/>
-              <a:t>‹#›</a:t>
-            </a:fld>
-            <a:endParaRPr kumimoji="1" lang="ja-JP" altLang="en-US"/>
-          </a:p>
-        </p:txBody>
-      </p:sp>
-      <p:sp>
-        <p:nvSpPr>
-          <p:cNvPr id="13" name="タイトル 1">
-            <a:extLst>
-              <a:ext uri="{FF2B5EF4-FFF2-40B4-BE49-F238E27FC236}">
-                <a16:creationId xmlns:a16="http://schemas.microsoft.com/office/drawing/2014/main" id="{A8302D35-8D17-DF03-C1F5-73D20A84F3EF}"/>
+                <a16:creationId xmlns:a16="http://schemas.microsoft.com/office/drawing/2014/main" id="{01664F20-F7C0-E482-4CCD-A50874056B4D}"/>
               </a:ext>
             </a:extLst>
           </p:cNvPr>
@@ -1524,10 +927,10 @@
       </p:sp>
       <p:sp>
         <p:nvSpPr>
-          <p:cNvPr id="14" name="コンテンツ プレースホルダー 2">
+          <p:cNvPr id="8" name="コンテンツ プレースホルダー 2">
             <a:extLst>
               <a:ext uri="{FF2B5EF4-FFF2-40B4-BE49-F238E27FC236}">
-                <a16:creationId xmlns:a16="http://schemas.microsoft.com/office/drawing/2014/main" id="{630B5AC0-4267-B83C-555E-E08AE0C09536}"/>
+                <a16:creationId xmlns:a16="http://schemas.microsoft.com/office/drawing/2014/main" id="{759E38C0-9660-9A49-7A90-097EDCC0796E}"/>
               </a:ext>
             </a:extLst>
           </p:cNvPr>
@@ -1546,7 +949,13 @@
         </p:spPr>
         <p:txBody>
           <a:bodyPr/>
-          <a:lstStyle/>
+          <a:lstStyle>
+            <a:lvl2pPr marL="914400" indent="-457200">
+              <a:buFont typeface="+mj-lt"/>
+              <a:buAutoNum type="arabicPeriod"/>
+              <a:defRPr/>
+            </a:lvl2pPr>
+          </a:lstStyle>
           <a:p>
             <a:pPr lvl="0"/>
             <a:r>
@@ -1613,6 +1022,45 @@
               <a:rPr kumimoji="1" lang="ja-JP" altLang="en-US" dirty="0"/>
               <a:t>レベル</a:t>
             </a:r>
+          </a:p>
+        </p:txBody>
+      </p:sp>
+      <p:sp>
+        <p:nvSpPr>
+          <p:cNvPr id="10" name="スライド番号プレースホルダー 8">
+            <a:extLst>
+              <a:ext uri="{FF2B5EF4-FFF2-40B4-BE49-F238E27FC236}">
+                <a16:creationId xmlns:a16="http://schemas.microsoft.com/office/drawing/2014/main" id="{22D7A308-0628-F881-8567-86E4E9532F9D}"/>
+              </a:ext>
+            </a:extLst>
+          </p:cNvPr>
+          <p:cNvSpPr>
+            <a:spLocks noGrp="1"/>
+          </p:cNvSpPr>
+          <p:nvPr>
+            <p:ph type="sldNum" sz="quarter" idx="12"/>
+          </p:nvPr>
+        </p:nvSpPr>
+        <p:spPr>
+          <a:xfrm>
+            <a:off x="8610600" y="6421667"/>
+            <a:ext cx="2743200" cy="365125"/>
+          </a:xfrm>
+        </p:spPr>
+        <p:txBody>
+          <a:bodyPr/>
+          <a:lstStyle>
+            <a:lvl1pPr>
+              <a:defRPr sz="800"/>
+            </a:lvl1pPr>
+          </a:lstStyle>
+          <a:p>
+            <a:fld id="{9EBFBC76-F46F-4ADD-8228-9529630895ED}" type="slidenum">
+              <a:rPr lang="ja-JP" altLang="en-US" smtClean="0"/>
+              <a:pPr/>
+              <a:t>‹#›</a:t>
+            </a:fld>
+            <a:endParaRPr lang="ja-JP" altLang="en-US" dirty="0"/>
           </a:p>
         </p:txBody>
       </p:sp>
@@ -1630,6 +1078,217 @@
 </file>
 
 <file path=ppt/slideLayouts/slideLayout3.xml><?xml version="1.0" encoding="utf-8"?>
+<p:sldLayout xmlns:a="http://schemas.openxmlformats.org/drawingml/2006/main" xmlns:r="http://schemas.openxmlformats.org/officeDocument/2006/relationships" xmlns:p="http://schemas.openxmlformats.org/presentationml/2006/main" preserve="1" userDrawn="1">
+  <p:cSld name="1_タイトルとコンテンツ">
+    <p:spTree>
+      <p:nvGrpSpPr>
+        <p:cNvPr id="1" name=""/>
+        <p:cNvGrpSpPr/>
+        <p:nvPr/>
+      </p:nvGrpSpPr>
+      <p:grpSpPr>
+        <a:xfrm>
+          <a:off x="0" y="0"/>
+          <a:ext cx="0" cy="0"/>
+          <a:chOff x="0" y="0"/>
+          <a:chExt cx="0" cy="0"/>
+        </a:xfrm>
+      </p:grpSpPr>
+      <p:sp>
+        <p:nvSpPr>
+          <p:cNvPr id="7" name="タイトル 1">
+            <a:extLst>
+              <a:ext uri="{FF2B5EF4-FFF2-40B4-BE49-F238E27FC236}">
+                <a16:creationId xmlns:a16="http://schemas.microsoft.com/office/drawing/2014/main" id="{01664F20-F7C0-E482-4CCD-A50874056B4D}"/>
+              </a:ext>
+            </a:extLst>
+          </p:cNvPr>
+          <p:cNvSpPr>
+            <a:spLocks noGrp="1"/>
+          </p:cNvSpPr>
+          <p:nvPr>
+            <p:ph type="title"/>
+          </p:nvPr>
+        </p:nvSpPr>
+        <p:spPr>
+          <a:xfrm>
+            <a:off x="167951" y="365124"/>
+            <a:ext cx="11877869" cy="540000"/>
+          </a:xfrm>
+        </p:spPr>
+        <p:txBody>
+          <a:bodyPr>
+            <a:normAutofit/>
+          </a:bodyPr>
+          <a:lstStyle>
+            <a:lvl1pPr>
+              <a:defRPr sz="2400" b="1">
+                <a:latin typeface="Meiryo UI" panose="020B0604030504040204" pitchFamily="50" charset="-128"/>
+                <a:ea typeface="Meiryo UI" panose="020B0604030504040204" pitchFamily="50" charset="-128"/>
+              </a:defRPr>
+            </a:lvl1pPr>
+          </a:lstStyle>
+          <a:p>
+            <a:r>
+              <a:rPr kumimoji="1" lang="ja-JP" altLang="en-US" dirty="0"/>
+              <a:t>マスター タイトルの書式設定</a:t>
+            </a:r>
+          </a:p>
+        </p:txBody>
+      </p:sp>
+      <p:sp>
+        <p:nvSpPr>
+          <p:cNvPr id="8" name="コンテンツ プレースホルダー 2">
+            <a:extLst>
+              <a:ext uri="{FF2B5EF4-FFF2-40B4-BE49-F238E27FC236}">
+                <a16:creationId xmlns:a16="http://schemas.microsoft.com/office/drawing/2014/main" id="{759E38C0-9660-9A49-7A90-097EDCC0796E}"/>
+              </a:ext>
+            </a:extLst>
+          </p:cNvPr>
+          <p:cNvSpPr>
+            <a:spLocks noGrp="1"/>
+          </p:cNvSpPr>
+          <p:nvPr>
+            <p:ph idx="1"/>
+          </p:nvPr>
+        </p:nvSpPr>
+        <p:spPr>
+          <a:xfrm>
+            <a:off x="167951" y="1073020"/>
+            <a:ext cx="11877869" cy="5103943"/>
+          </a:xfrm>
+        </p:spPr>
+        <p:txBody>
+          <a:bodyPr/>
+          <a:lstStyle>
+            <a:lvl2pPr marL="914400" indent="-457200">
+              <a:buFont typeface="Arial" panose="020B0604020202020204" pitchFamily="34" charset="0"/>
+              <a:buChar char="•"/>
+              <a:defRPr/>
+            </a:lvl2pPr>
+          </a:lstStyle>
+          <a:p>
+            <a:pPr lvl="0"/>
+            <a:r>
+              <a:rPr kumimoji="1" lang="ja-JP" altLang="en-US" dirty="0"/>
+              <a:t>マスター テキストの書式設定</a:t>
+            </a:r>
+          </a:p>
+          <a:p>
+            <a:pPr lvl="1"/>
+            <a:r>
+              <a:rPr kumimoji="1" lang="ja-JP" altLang="en-US" dirty="0"/>
+              <a:t>第 </a:t>
+            </a:r>
+            <a:r>
+              <a:rPr kumimoji="1" lang="en-US" altLang="ja-JP" dirty="0"/>
+              <a:t>2 </a:t>
+            </a:r>
+            <a:r>
+              <a:rPr kumimoji="1" lang="ja-JP" altLang="en-US" dirty="0"/>
+              <a:t>レベル</a:t>
+            </a:r>
+          </a:p>
+          <a:p>
+            <a:pPr lvl="2"/>
+            <a:r>
+              <a:rPr kumimoji="1" lang="ja-JP" altLang="en-US" dirty="0"/>
+              <a:t>第 </a:t>
+            </a:r>
+            <a:r>
+              <a:rPr kumimoji="1" lang="en-US" altLang="ja-JP" dirty="0"/>
+              <a:t>3 </a:t>
+            </a:r>
+            <a:r>
+              <a:rPr kumimoji="1" lang="ja-JP" altLang="en-US" dirty="0"/>
+              <a:t>レベル</a:t>
+            </a:r>
+          </a:p>
+          <a:p>
+            <a:pPr lvl="3"/>
+            <a:r>
+              <a:rPr kumimoji="1" lang="ja-JP" altLang="en-US" dirty="0"/>
+              <a:t>第 </a:t>
+            </a:r>
+            <a:r>
+              <a:rPr kumimoji="1" lang="en-US" altLang="ja-JP" dirty="0"/>
+              <a:t>4 </a:t>
+            </a:r>
+            <a:r>
+              <a:rPr kumimoji="1" lang="ja-JP" altLang="en-US" dirty="0"/>
+              <a:t>レベル</a:t>
+            </a:r>
+          </a:p>
+          <a:p>
+            <a:pPr lvl="4"/>
+            <a:r>
+              <a:rPr kumimoji="1" lang="ja-JP" altLang="en-US" dirty="0"/>
+              <a:t>第 </a:t>
+            </a:r>
+            <a:r>
+              <a:rPr kumimoji="1" lang="en-US" altLang="ja-JP" dirty="0"/>
+              <a:t>5 </a:t>
+            </a:r>
+            <a:r>
+              <a:rPr kumimoji="1" lang="ja-JP" altLang="en-US" dirty="0"/>
+              <a:t>レベル</a:t>
+            </a:r>
+          </a:p>
+        </p:txBody>
+      </p:sp>
+      <p:sp>
+        <p:nvSpPr>
+          <p:cNvPr id="10" name="スライド番号プレースホルダー 8">
+            <a:extLst>
+              <a:ext uri="{FF2B5EF4-FFF2-40B4-BE49-F238E27FC236}">
+                <a16:creationId xmlns:a16="http://schemas.microsoft.com/office/drawing/2014/main" id="{22D7A308-0628-F881-8567-86E4E9532F9D}"/>
+              </a:ext>
+            </a:extLst>
+          </p:cNvPr>
+          <p:cNvSpPr>
+            <a:spLocks noGrp="1"/>
+          </p:cNvSpPr>
+          <p:nvPr>
+            <p:ph type="sldNum" sz="quarter" idx="12"/>
+          </p:nvPr>
+        </p:nvSpPr>
+        <p:spPr>
+          <a:xfrm>
+            <a:off x="8610600" y="6421667"/>
+            <a:ext cx="2743200" cy="365125"/>
+          </a:xfrm>
+        </p:spPr>
+        <p:txBody>
+          <a:bodyPr/>
+          <a:lstStyle>
+            <a:lvl1pPr>
+              <a:defRPr sz="800"/>
+            </a:lvl1pPr>
+          </a:lstStyle>
+          <a:p>
+            <a:fld id="{9EBFBC76-F46F-4ADD-8228-9529630895ED}" type="slidenum">
+              <a:rPr lang="ja-JP" altLang="en-US" smtClean="0"/>
+              <a:pPr/>
+              <a:t>‹#›</a:t>
+            </a:fld>
+            <a:endParaRPr lang="ja-JP" altLang="en-US" dirty="0"/>
+          </a:p>
+        </p:txBody>
+      </p:sp>
+    </p:spTree>
+    <p:extLst>
+      <p:ext uri="{BB962C8B-B14F-4D97-AF65-F5344CB8AC3E}">
+        <p14:creationId xmlns:p14="http://schemas.microsoft.com/office/powerpoint/2010/main" val="2384987877"/>
+      </p:ext>
+    </p:extLst>
+  </p:cSld>
+  <p:clrMapOvr>
+    <a:masterClrMapping/>
+  </p:clrMapOvr>
+</p:sldLayout>
+</file>
+
+<file path=ppt/slideLayouts/slideLayout4.xml><?xml version="1.0" encoding="utf-8"?>
 <p:sldLayout xmlns:a="http://schemas.openxmlformats.org/drawingml/2006/main" xmlns:r="http://schemas.openxmlformats.org/officeDocument/2006/relationships" xmlns:p="http://schemas.openxmlformats.org/presentationml/2006/main" type="secHead" preserve="1">
   <p:cSld name="セクション見出し">
     <p:spTree>
@@ -1810,64 +1469,10 @@
       </p:sp>
       <p:sp>
         <p:nvSpPr>
-          <p:cNvPr id="4" name="日付プレースホルダー 3">
+          <p:cNvPr id="7" name="スライド番号プレースホルダー 8">
             <a:extLst>
               <a:ext uri="{FF2B5EF4-FFF2-40B4-BE49-F238E27FC236}">
-                <a16:creationId xmlns:a16="http://schemas.microsoft.com/office/drawing/2014/main" id="{2AC23C55-8327-924C-2B72-D685D3026055}"/>
-              </a:ext>
-            </a:extLst>
-          </p:cNvPr>
-          <p:cNvSpPr>
-            <a:spLocks noGrp="1"/>
-          </p:cNvSpPr>
-          <p:nvPr>
-            <p:ph type="dt" sz="half" idx="10"/>
-          </p:nvPr>
-        </p:nvSpPr>
-        <p:spPr/>
-        <p:txBody>
-          <a:bodyPr/>
-          <a:lstStyle/>
-          <a:p>
-            <a:fld id="{E3EFBC31-9ECA-48C0-910F-E09377915FB8}" type="datetimeFigureOut">
-              <a:rPr kumimoji="1" lang="ja-JP" altLang="en-US" smtClean="0"/>
-              <a:t>2026/7/5</a:t>
-            </a:fld>
-            <a:endParaRPr kumimoji="1" lang="ja-JP" altLang="en-US"/>
-          </a:p>
-        </p:txBody>
-      </p:sp>
-      <p:sp>
-        <p:nvSpPr>
-          <p:cNvPr id="5" name="フッター プレースホルダー 4">
-            <a:extLst>
-              <a:ext uri="{FF2B5EF4-FFF2-40B4-BE49-F238E27FC236}">
-                <a16:creationId xmlns:a16="http://schemas.microsoft.com/office/drawing/2014/main" id="{AB1B9B42-5325-6348-7A2E-823A20CCF2C1}"/>
-              </a:ext>
-            </a:extLst>
-          </p:cNvPr>
-          <p:cNvSpPr>
-            <a:spLocks noGrp="1"/>
-          </p:cNvSpPr>
-          <p:nvPr>
-            <p:ph type="ftr" sz="quarter" idx="11"/>
-          </p:nvPr>
-        </p:nvSpPr>
-        <p:spPr/>
-        <p:txBody>
-          <a:bodyPr/>
-          <a:lstStyle/>
-          <a:p>
-            <a:endParaRPr kumimoji="1" lang="ja-JP" altLang="en-US"/>
-          </a:p>
-        </p:txBody>
-      </p:sp>
-      <p:sp>
-        <p:nvSpPr>
-          <p:cNvPr id="6" name="スライド番号プレースホルダー 5">
-            <a:extLst>
-              <a:ext uri="{FF2B5EF4-FFF2-40B4-BE49-F238E27FC236}">
-                <a16:creationId xmlns:a16="http://schemas.microsoft.com/office/drawing/2014/main" id="{0B0BB805-FA2B-03EC-E53A-E3CA558927B4}"/>
+                <a16:creationId xmlns:a16="http://schemas.microsoft.com/office/drawing/2014/main" id="{51D98275-5521-9186-79B1-A367B515DB90}"/>
               </a:ext>
             </a:extLst>
           </p:cNvPr>
@@ -1878,16 +1483,26 @@
             <p:ph type="sldNum" sz="quarter" idx="12"/>
           </p:nvPr>
         </p:nvSpPr>
-        <p:spPr/>
+        <p:spPr>
+          <a:xfrm>
+            <a:off x="8610600" y="6421667"/>
+            <a:ext cx="2743200" cy="365125"/>
+          </a:xfrm>
+        </p:spPr>
         <p:txBody>
           <a:bodyPr/>
-          <a:lstStyle/>
+          <a:lstStyle>
+            <a:lvl1pPr>
+              <a:defRPr sz="800"/>
+            </a:lvl1pPr>
+          </a:lstStyle>
           <a:p>
             <a:fld id="{9EBFBC76-F46F-4ADD-8228-9529630895ED}" type="slidenum">
-              <a:rPr kumimoji="1" lang="ja-JP" altLang="en-US" smtClean="0"/>
+              <a:rPr lang="ja-JP" altLang="en-US" smtClean="0"/>
+              <a:pPr/>
               <a:t>‹#›</a:t>
             </a:fld>
-            <a:endParaRPr kumimoji="1" lang="ja-JP" altLang="en-US"/>
+            <a:endParaRPr lang="ja-JP" altLang="en-US" dirty="0"/>
           </a:p>
         </p:txBody>
       </p:sp>
@@ -1895,1696 +1510,6 @@
     <p:extLst>
       <p:ext uri="{BB962C8B-B14F-4D97-AF65-F5344CB8AC3E}">
         <p14:creationId xmlns:p14="http://schemas.microsoft.com/office/powerpoint/2010/main" val="3841387114"/>
-      </p:ext>
-    </p:extLst>
-  </p:cSld>
-  <p:clrMapOvr>
-    <a:masterClrMapping/>
-  </p:clrMapOvr>
-</p:sldLayout>
-</file>
-
-<file path=ppt/slideLayouts/slideLayout4.xml><?xml version="1.0" encoding="utf-8"?>
-<p:sldLayout xmlns:a="http://schemas.openxmlformats.org/drawingml/2006/main" xmlns:r="http://schemas.openxmlformats.org/officeDocument/2006/relationships" xmlns:p="http://schemas.openxmlformats.org/presentationml/2006/main" type="twoObj" preserve="1">
-  <p:cSld name="2 つのコンテンツ">
-    <p:spTree>
-      <p:nvGrpSpPr>
-        <p:cNvPr id="1" name=""/>
-        <p:cNvGrpSpPr/>
-        <p:nvPr/>
-      </p:nvGrpSpPr>
-      <p:grpSpPr>
-        <a:xfrm>
-          <a:off x="0" y="0"/>
-          <a:ext cx="0" cy="0"/>
-          <a:chOff x="0" y="0"/>
-          <a:chExt cx="0" cy="0"/>
-        </a:xfrm>
-      </p:grpSpPr>
-      <p:sp>
-        <p:nvSpPr>
-          <p:cNvPr id="2" name="タイトル 1">
-            <a:extLst>
-              <a:ext uri="{FF2B5EF4-FFF2-40B4-BE49-F238E27FC236}">
-                <a16:creationId xmlns:a16="http://schemas.microsoft.com/office/drawing/2014/main" id="{C82A8F03-F9A4-C9E1-8930-9B9AF0D34BE7}"/>
-              </a:ext>
-            </a:extLst>
-          </p:cNvPr>
-          <p:cNvSpPr>
-            <a:spLocks noGrp="1"/>
-          </p:cNvSpPr>
-          <p:nvPr>
-            <p:ph type="title"/>
-          </p:nvPr>
-        </p:nvSpPr>
-        <p:spPr/>
-        <p:txBody>
-          <a:bodyPr/>
-          <a:lstStyle/>
-          <a:p>
-            <a:r>
-              <a:rPr kumimoji="1" lang="ja-JP" altLang="en-US"/>
-              <a:t>マスター タイトルの書式設定</a:t>
-            </a:r>
-          </a:p>
-        </p:txBody>
-      </p:sp>
-      <p:sp>
-        <p:nvSpPr>
-          <p:cNvPr id="3" name="コンテンツ プレースホルダー 2">
-            <a:extLst>
-              <a:ext uri="{FF2B5EF4-FFF2-40B4-BE49-F238E27FC236}">
-                <a16:creationId xmlns:a16="http://schemas.microsoft.com/office/drawing/2014/main" id="{AE9B11C5-849D-9104-8534-05B157123DC0}"/>
-              </a:ext>
-            </a:extLst>
-          </p:cNvPr>
-          <p:cNvSpPr>
-            <a:spLocks noGrp="1"/>
-          </p:cNvSpPr>
-          <p:nvPr>
-            <p:ph sz="half" idx="1"/>
-          </p:nvPr>
-        </p:nvSpPr>
-        <p:spPr>
-          <a:xfrm>
-            <a:off x="838200" y="1825625"/>
-            <a:ext cx="5181600" cy="4351338"/>
-          </a:xfrm>
-        </p:spPr>
-        <p:txBody>
-          <a:bodyPr/>
-          <a:lstStyle/>
-          <a:p>
-            <a:pPr lvl="0"/>
-            <a:r>
-              <a:rPr kumimoji="1" lang="ja-JP" altLang="en-US"/>
-              <a:t>マスター テキストの書式設定</a:t>
-            </a:r>
-          </a:p>
-          <a:p>
-            <a:pPr lvl="1"/>
-            <a:r>
-              <a:rPr kumimoji="1" lang="ja-JP" altLang="en-US"/>
-              <a:t>第 </a:t>
-            </a:r>
-            <a:r>
-              <a:rPr kumimoji="1" lang="en-US" altLang="ja-JP"/>
-              <a:t>2 </a:t>
-            </a:r>
-            <a:r>
-              <a:rPr kumimoji="1" lang="ja-JP" altLang="en-US"/>
-              <a:t>レベル</a:t>
-            </a:r>
-          </a:p>
-          <a:p>
-            <a:pPr lvl="2"/>
-            <a:r>
-              <a:rPr kumimoji="1" lang="ja-JP" altLang="en-US"/>
-              <a:t>第 </a:t>
-            </a:r>
-            <a:r>
-              <a:rPr kumimoji="1" lang="en-US" altLang="ja-JP"/>
-              <a:t>3 </a:t>
-            </a:r>
-            <a:r>
-              <a:rPr kumimoji="1" lang="ja-JP" altLang="en-US"/>
-              <a:t>レベル</a:t>
-            </a:r>
-          </a:p>
-          <a:p>
-            <a:pPr lvl="3"/>
-            <a:r>
-              <a:rPr kumimoji="1" lang="ja-JP" altLang="en-US"/>
-              <a:t>第 </a:t>
-            </a:r>
-            <a:r>
-              <a:rPr kumimoji="1" lang="en-US" altLang="ja-JP"/>
-              <a:t>4 </a:t>
-            </a:r>
-            <a:r>
-              <a:rPr kumimoji="1" lang="ja-JP" altLang="en-US"/>
-              <a:t>レベル</a:t>
-            </a:r>
-          </a:p>
-          <a:p>
-            <a:pPr lvl="4"/>
-            <a:r>
-              <a:rPr kumimoji="1" lang="ja-JP" altLang="en-US"/>
-              <a:t>第 </a:t>
-            </a:r>
-            <a:r>
-              <a:rPr kumimoji="1" lang="en-US" altLang="ja-JP"/>
-              <a:t>5 </a:t>
-            </a:r>
-            <a:r>
-              <a:rPr kumimoji="1" lang="ja-JP" altLang="en-US"/>
-              <a:t>レベル</a:t>
-            </a:r>
-          </a:p>
-        </p:txBody>
-      </p:sp>
-      <p:sp>
-        <p:nvSpPr>
-          <p:cNvPr id="4" name="コンテンツ プレースホルダー 3">
-            <a:extLst>
-              <a:ext uri="{FF2B5EF4-FFF2-40B4-BE49-F238E27FC236}">
-                <a16:creationId xmlns:a16="http://schemas.microsoft.com/office/drawing/2014/main" id="{1E1E799F-E1CC-CC44-0753-6D7D0C923800}"/>
-              </a:ext>
-            </a:extLst>
-          </p:cNvPr>
-          <p:cNvSpPr>
-            <a:spLocks noGrp="1"/>
-          </p:cNvSpPr>
-          <p:nvPr>
-            <p:ph sz="half" idx="2"/>
-          </p:nvPr>
-        </p:nvSpPr>
-        <p:spPr>
-          <a:xfrm>
-            <a:off x="6172200" y="1825625"/>
-            <a:ext cx="5181600" cy="4351338"/>
-          </a:xfrm>
-        </p:spPr>
-        <p:txBody>
-          <a:bodyPr/>
-          <a:lstStyle/>
-          <a:p>
-            <a:pPr lvl="0"/>
-            <a:r>
-              <a:rPr kumimoji="1" lang="ja-JP" altLang="en-US"/>
-              <a:t>マスター テキストの書式設定</a:t>
-            </a:r>
-          </a:p>
-          <a:p>
-            <a:pPr lvl="1"/>
-            <a:r>
-              <a:rPr kumimoji="1" lang="ja-JP" altLang="en-US"/>
-              <a:t>第 </a:t>
-            </a:r>
-            <a:r>
-              <a:rPr kumimoji="1" lang="en-US" altLang="ja-JP"/>
-              <a:t>2 </a:t>
-            </a:r>
-            <a:r>
-              <a:rPr kumimoji="1" lang="ja-JP" altLang="en-US"/>
-              <a:t>レベル</a:t>
-            </a:r>
-          </a:p>
-          <a:p>
-            <a:pPr lvl="2"/>
-            <a:r>
-              <a:rPr kumimoji="1" lang="ja-JP" altLang="en-US"/>
-              <a:t>第 </a:t>
-            </a:r>
-            <a:r>
-              <a:rPr kumimoji="1" lang="en-US" altLang="ja-JP"/>
-              <a:t>3 </a:t>
-            </a:r>
-            <a:r>
-              <a:rPr kumimoji="1" lang="ja-JP" altLang="en-US"/>
-              <a:t>レベル</a:t>
-            </a:r>
-          </a:p>
-          <a:p>
-            <a:pPr lvl="3"/>
-            <a:r>
-              <a:rPr kumimoji="1" lang="ja-JP" altLang="en-US"/>
-              <a:t>第 </a:t>
-            </a:r>
-            <a:r>
-              <a:rPr kumimoji="1" lang="en-US" altLang="ja-JP"/>
-              <a:t>4 </a:t>
-            </a:r>
-            <a:r>
-              <a:rPr kumimoji="1" lang="ja-JP" altLang="en-US"/>
-              <a:t>レベル</a:t>
-            </a:r>
-          </a:p>
-          <a:p>
-            <a:pPr lvl="4"/>
-            <a:r>
-              <a:rPr kumimoji="1" lang="ja-JP" altLang="en-US"/>
-              <a:t>第 </a:t>
-            </a:r>
-            <a:r>
-              <a:rPr kumimoji="1" lang="en-US" altLang="ja-JP"/>
-              <a:t>5 </a:t>
-            </a:r>
-            <a:r>
-              <a:rPr kumimoji="1" lang="ja-JP" altLang="en-US"/>
-              <a:t>レベル</a:t>
-            </a:r>
-          </a:p>
-        </p:txBody>
-      </p:sp>
-      <p:sp>
-        <p:nvSpPr>
-          <p:cNvPr id="5" name="日付プレースホルダー 4">
-            <a:extLst>
-              <a:ext uri="{FF2B5EF4-FFF2-40B4-BE49-F238E27FC236}">
-                <a16:creationId xmlns:a16="http://schemas.microsoft.com/office/drawing/2014/main" id="{F4315350-56EC-072A-EE57-7D7FD671B06C}"/>
-              </a:ext>
-            </a:extLst>
-          </p:cNvPr>
-          <p:cNvSpPr>
-            <a:spLocks noGrp="1"/>
-          </p:cNvSpPr>
-          <p:nvPr>
-            <p:ph type="dt" sz="half" idx="10"/>
-          </p:nvPr>
-        </p:nvSpPr>
-        <p:spPr/>
-        <p:txBody>
-          <a:bodyPr/>
-          <a:lstStyle/>
-          <a:p>
-            <a:fld id="{E3EFBC31-9ECA-48C0-910F-E09377915FB8}" type="datetimeFigureOut">
-              <a:rPr kumimoji="1" lang="ja-JP" altLang="en-US" smtClean="0"/>
-              <a:t>2026/7/5</a:t>
-            </a:fld>
-            <a:endParaRPr kumimoji="1" lang="ja-JP" altLang="en-US"/>
-          </a:p>
-        </p:txBody>
-      </p:sp>
-      <p:sp>
-        <p:nvSpPr>
-          <p:cNvPr id="6" name="フッター プレースホルダー 5">
-            <a:extLst>
-              <a:ext uri="{FF2B5EF4-FFF2-40B4-BE49-F238E27FC236}">
-                <a16:creationId xmlns:a16="http://schemas.microsoft.com/office/drawing/2014/main" id="{39CFC015-F252-9E7E-F23E-9859CCF4238C}"/>
-              </a:ext>
-            </a:extLst>
-          </p:cNvPr>
-          <p:cNvSpPr>
-            <a:spLocks noGrp="1"/>
-          </p:cNvSpPr>
-          <p:nvPr>
-            <p:ph type="ftr" sz="quarter" idx="11"/>
-          </p:nvPr>
-        </p:nvSpPr>
-        <p:spPr/>
-        <p:txBody>
-          <a:bodyPr/>
-          <a:lstStyle/>
-          <a:p>
-            <a:endParaRPr kumimoji="1" lang="ja-JP" altLang="en-US"/>
-          </a:p>
-        </p:txBody>
-      </p:sp>
-      <p:sp>
-        <p:nvSpPr>
-          <p:cNvPr id="7" name="スライド番号プレースホルダー 6">
-            <a:extLst>
-              <a:ext uri="{FF2B5EF4-FFF2-40B4-BE49-F238E27FC236}">
-                <a16:creationId xmlns:a16="http://schemas.microsoft.com/office/drawing/2014/main" id="{3F775C56-D7A0-4254-A2E6-4CA99D50A303}"/>
-              </a:ext>
-            </a:extLst>
-          </p:cNvPr>
-          <p:cNvSpPr>
-            <a:spLocks noGrp="1"/>
-          </p:cNvSpPr>
-          <p:nvPr>
-            <p:ph type="sldNum" sz="quarter" idx="12"/>
-          </p:nvPr>
-        </p:nvSpPr>
-        <p:spPr/>
-        <p:txBody>
-          <a:bodyPr/>
-          <a:lstStyle/>
-          <a:p>
-            <a:fld id="{9EBFBC76-F46F-4ADD-8228-9529630895ED}" type="slidenum">
-              <a:rPr kumimoji="1" lang="ja-JP" altLang="en-US" smtClean="0"/>
-              <a:t>‹#›</a:t>
-            </a:fld>
-            <a:endParaRPr kumimoji="1" lang="ja-JP" altLang="en-US"/>
-          </a:p>
-        </p:txBody>
-      </p:sp>
-    </p:spTree>
-    <p:extLst>
-      <p:ext uri="{BB962C8B-B14F-4D97-AF65-F5344CB8AC3E}">
-        <p14:creationId xmlns:p14="http://schemas.microsoft.com/office/powerpoint/2010/main" val="3546901665"/>
-      </p:ext>
-    </p:extLst>
-  </p:cSld>
-  <p:clrMapOvr>
-    <a:masterClrMapping/>
-  </p:clrMapOvr>
-</p:sldLayout>
-</file>
-
-<file path=ppt/slideLayouts/slideLayout5.xml><?xml version="1.0" encoding="utf-8"?>
-<p:sldLayout xmlns:a="http://schemas.openxmlformats.org/drawingml/2006/main" xmlns:r="http://schemas.openxmlformats.org/officeDocument/2006/relationships" xmlns:p="http://schemas.openxmlformats.org/presentationml/2006/main" type="twoTxTwoObj" preserve="1">
-  <p:cSld name="比較">
-    <p:spTree>
-      <p:nvGrpSpPr>
-        <p:cNvPr id="1" name=""/>
-        <p:cNvGrpSpPr/>
-        <p:nvPr/>
-      </p:nvGrpSpPr>
-      <p:grpSpPr>
-        <a:xfrm>
-          <a:off x="0" y="0"/>
-          <a:ext cx="0" cy="0"/>
-          <a:chOff x="0" y="0"/>
-          <a:chExt cx="0" cy="0"/>
-        </a:xfrm>
-      </p:grpSpPr>
-      <p:sp>
-        <p:nvSpPr>
-          <p:cNvPr id="2" name="タイトル 1">
-            <a:extLst>
-              <a:ext uri="{FF2B5EF4-FFF2-40B4-BE49-F238E27FC236}">
-                <a16:creationId xmlns:a16="http://schemas.microsoft.com/office/drawing/2014/main" id="{0F87F651-F4E6-22A7-969C-361E7EB82358}"/>
-              </a:ext>
-            </a:extLst>
-          </p:cNvPr>
-          <p:cNvSpPr>
-            <a:spLocks noGrp="1"/>
-          </p:cNvSpPr>
-          <p:nvPr>
-            <p:ph type="title"/>
-          </p:nvPr>
-        </p:nvSpPr>
-        <p:spPr>
-          <a:xfrm>
-            <a:off x="839788" y="365125"/>
-            <a:ext cx="10515600" cy="1325563"/>
-          </a:xfrm>
-        </p:spPr>
-        <p:txBody>
-          <a:bodyPr/>
-          <a:lstStyle/>
-          <a:p>
-            <a:r>
-              <a:rPr kumimoji="1" lang="ja-JP" altLang="en-US"/>
-              <a:t>マスター タイトルの書式設定</a:t>
-            </a:r>
-          </a:p>
-        </p:txBody>
-      </p:sp>
-      <p:sp>
-        <p:nvSpPr>
-          <p:cNvPr id="3" name="テキスト プレースホルダー 2">
-            <a:extLst>
-              <a:ext uri="{FF2B5EF4-FFF2-40B4-BE49-F238E27FC236}">
-                <a16:creationId xmlns:a16="http://schemas.microsoft.com/office/drawing/2014/main" id="{D1D87F37-09C8-1C47-DA85-89348412F3DE}"/>
-              </a:ext>
-            </a:extLst>
-          </p:cNvPr>
-          <p:cNvSpPr>
-            <a:spLocks noGrp="1"/>
-          </p:cNvSpPr>
-          <p:nvPr>
-            <p:ph type="body" idx="1"/>
-          </p:nvPr>
-        </p:nvSpPr>
-        <p:spPr>
-          <a:xfrm>
-            <a:off x="839788" y="1681163"/>
-            <a:ext cx="5157787" cy="823912"/>
-          </a:xfrm>
-        </p:spPr>
-        <p:txBody>
-          <a:bodyPr anchor="b"/>
-          <a:lstStyle>
-            <a:lvl1pPr marL="0" indent="0">
-              <a:buNone/>
-              <a:defRPr sz="2400" b="1"/>
-            </a:lvl1pPr>
-            <a:lvl2pPr marL="457200" indent="0">
-              <a:buNone/>
-              <a:defRPr sz="2000" b="1"/>
-            </a:lvl2pPr>
-            <a:lvl3pPr marL="914400" indent="0">
-              <a:buNone/>
-              <a:defRPr sz="1800" b="1"/>
-            </a:lvl3pPr>
-            <a:lvl4pPr marL="1371600" indent="0">
-              <a:buNone/>
-              <a:defRPr sz="1600" b="1"/>
-            </a:lvl4pPr>
-            <a:lvl5pPr marL="1828800" indent="0">
-              <a:buNone/>
-              <a:defRPr sz="1600" b="1"/>
-            </a:lvl5pPr>
-            <a:lvl6pPr marL="2286000" indent="0">
-              <a:buNone/>
-              <a:defRPr sz="1600" b="1"/>
-            </a:lvl6pPr>
-            <a:lvl7pPr marL="2743200" indent="0">
-              <a:buNone/>
-              <a:defRPr sz="1600" b="1"/>
-            </a:lvl7pPr>
-            <a:lvl8pPr marL="3200400" indent="0">
-              <a:buNone/>
-              <a:defRPr sz="1600" b="1"/>
-            </a:lvl8pPr>
-            <a:lvl9pPr marL="3657600" indent="0">
-              <a:buNone/>
-              <a:defRPr sz="1600" b="1"/>
-            </a:lvl9pPr>
-          </a:lstStyle>
-          <a:p>
-            <a:pPr lvl="0"/>
-            <a:r>
-              <a:rPr kumimoji="1" lang="ja-JP" altLang="en-US"/>
-              <a:t>マスター テキストの書式設定</a:t>
-            </a:r>
-          </a:p>
-        </p:txBody>
-      </p:sp>
-      <p:sp>
-        <p:nvSpPr>
-          <p:cNvPr id="4" name="コンテンツ プレースホルダー 3">
-            <a:extLst>
-              <a:ext uri="{FF2B5EF4-FFF2-40B4-BE49-F238E27FC236}">
-                <a16:creationId xmlns:a16="http://schemas.microsoft.com/office/drawing/2014/main" id="{041EDEFF-D785-4B71-7114-49A611C895D8}"/>
-              </a:ext>
-            </a:extLst>
-          </p:cNvPr>
-          <p:cNvSpPr>
-            <a:spLocks noGrp="1"/>
-          </p:cNvSpPr>
-          <p:nvPr>
-            <p:ph sz="half" idx="2"/>
-          </p:nvPr>
-        </p:nvSpPr>
-        <p:spPr>
-          <a:xfrm>
-            <a:off x="839788" y="2505075"/>
-            <a:ext cx="5157787" cy="3684588"/>
-          </a:xfrm>
-        </p:spPr>
-        <p:txBody>
-          <a:bodyPr/>
-          <a:lstStyle/>
-          <a:p>
-            <a:pPr lvl="0"/>
-            <a:r>
-              <a:rPr kumimoji="1" lang="ja-JP" altLang="en-US"/>
-              <a:t>マスター テキストの書式設定</a:t>
-            </a:r>
-          </a:p>
-          <a:p>
-            <a:pPr lvl="1"/>
-            <a:r>
-              <a:rPr kumimoji="1" lang="ja-JP" altLang="en-US"/>
-              <a:t>第 </a:t>
-            </a:r>
-            <a:r>
-              <a:rPr kumimoji="1" lang="en-US" altLang="ja-JP"/>
-              <a:t>2 </a:t>
-            </a:r>
-            <a:r>
-              <a:rPr kumimoji="1" lang="ja-JP" altLang="en-US"/>
-              <a:t>レベル</a:t>
-            </a:r>
-          </a:p>
-          <a:p>
-            <a:pPr lvl="2"/>
-            <a:r>
-              <a:rPr kumimoji="1" lang="ja-JP" altLang="en-US"/>
-              <a:t>第 </a:t>
-            </a:r>
-            <a:r>
-              <a:rPr kumimoji="1" lang="en-US" altLang="ja-JP"/>
-              <a:t>3 </a:t>
-            </a:r>
-            <a:r>
-              <a:rPr kumimoji="1" lang="ja-JP" altLang="en-US"/>
-              <a:t>レベル</a:t>
-            </a:r>
-          </a:p>
-          <a:p>
-            <a:pPr lvl="3"/>
-            <a:r>
-              <a:rPr kumimoji="1" lang="ja-JP" altLang="en-US"/>
-              <a:t>第 </a:t>
-            </a:r>
-            <a:r>
-              <a:rPr kumimoji="1" lang="en-US" altLang="ja-JP"/>
-              <a:t>4 </a:t>
-            </a:r>
-            <a:r>
-              <a:rPr kumimoji="1" lang="ja-JP" altLang="en-US"/>
-              <a:t>レベル</a:t>
-            </a:r>
-          </a:p>
-          <a:p>
-            <a:pPr lvl="4"/>
-            <a:r>
-              <a:rPr kumimoji="1" lang="ja-JP" altLang="en-US"/>
-              <a:t>第 </a:t>
-            </a:r>
-            <a:r>
-              <a:rPr kumimoji="1" lang="en-US" altLang="ja-JP"/>
-              <a:t>5 </a:t>
-            </a:r>
-            <a:r>
-              <a:rPr kumimoji="1" lang="ja-JP" altLang="en-US"/>
-              <a:t>レベル</a:t>
-            </a:r>
-          </a:p>
-        </p:txBody>
-      </p:sp>
-      <p:sp>
-        <p:nvSpPr>
-          <p:cNvPr id="5" name="テキスト プレースホルダー 4">
-            <a:extLst>
-              <a:ext uri="{FF2B5EF4-FFF2-40B4-BE49-F238E27FC236}">
-                <a16:creationId xmlns:a16="http://schemas.microsoft.com/office/drawing/2014/main" id="{A4CF3450-F545-1FFD-F875-8DE3CCB76B8D}"/>
-              </a:ext>
-            </a:extLst>
-          </p:cNvPr>
-          <p:cNvSpPr>
-            <a:spLocks noGrp="1"/>
-          </p:cNvSpPr>
-          <p:nvPr>
-            <p:ph type="body" sz="quarter" idx="3"/>
-          </p:nvPr>
-        </p:nvSpPr>
-        <p:spPr>
-          <a:xfrm>
-            <a:off x="6172200" y="1681163"/>
-            <a:ext cx="5183188" cy="823912"/>
-          </a:xfrm>
-        </p:spPr>
-        <p:txBody>
-          <a:bodyPr anchor="b"/>
-          <a:lstStyle>
-            <a:lvl1pPr marL="0" indent="0">
-              <a:buNone/>
-              <a:defRPr sz="2400" b="1"/>
-            </a:lvl1pPr>
-            <a:lvl2pPr marL="457200" indent="0">
-              <a:buNone/>
-              <a:defRPr sz="2000" b="1"/>
-            </a:lvl2pPr>
-            <a:lvl3pPr marL="914400" indent="0">
-              <a:buNone/>
-              <a:defRPr sz="1800" b="1"/>
-            </a:lvl3pPr>
-            <a:lvl4pPr marL="1371600" indent="0">
-              <a:buNone/>
-              <a:defRPr sz="1600" b="1"/>
-            </a:lvl4pPr>
-            <a:lvl5pPr marL="1828800" indent="0">
-              <a:buNone/>
-              <a:defRPr sz="1600" b="1"/>
-            </a:lvl5pPr>
-            <a:lvl6pPr marL="2286000" indent="0">
-              <a:buNone/>
-              <a:defRPr sz="1600" b="1"/>
-            </a:lvl6pPr>
-            <a:lvl7pPr marL="2743200" indent="0">
-              <a:buNone/>
-              <a:defRPr sz="1600" b="1"/>
-            </a:lvl7pPr>
-            <a:lvl8pPr marL="3200400" indent="0">
-              <a:buNone/>
-              <a:defRPr sz="1600" b="1"/>
-            </a:lvl8pPr>
-            <a:lvl9pPr marL="3657600" indent="0">
-              <a:buNone/>
-              <a:defRPr sz="1600" b="1"/>
-            </a:lvl9pPr>
-          </a:lstStyle>
-          <a:p>
-            <a:pPr lvl="0"/>
-            <a:r>
-              <a:rPr kumimoji="1" lang="ja-JP" altLang="en-US"/>
-              <a:t>マスター テキストの書式設定</a:t>
-            </a:r>
-          </a:p>
-        </p:txBody>
-      </p:sp>
-      <p:sp>
-        <p:nvSpPr>
-          <p:cNvPr id="6" name="コンテンツ プレースホルダー 5">
-            <a:extLst>
-              <a:ext uri="{FF2B5EF4-FFF2-40B4-BE49-F238E27FC236}">
-                <a16:creationId xmlns:a16="http://schemas.microsoft.com/office/drawing/2014/main" id="{95E611BD-461C-12F4-A3BC-6154F6BA1EDA}"/>
-              </a:ext>
-            </a:extLst>
-          </p:cNvPr>
-          <p:cNvSpPr>
-            <a:spLocks noGrp="1"/>
-          </p:cNvSpPr>
-          <p:nvPr>
-            <p:ph sz="quarter" idx="4"/>
-          </p:nvPr>
-        </p:nvSpPr>
-        <p:spPr>
-          <a:xfrm>
-            <a:off x="6172200" y="2505075"/>
-            <a:ext cx="5183188" cy="3684588"/>
-          </a:xfrm>
-        </p:spPr>
-        <p:txBody>
-          <a:bodyPr/>
-          <a:lstStyle/>
-          <a:p>
-            <a:pPr lvl="0"/>
-            <a:r>
-              <a:rPr kumimoji="1" lang="ja-JP" altLang="en-US"/>
-              <a:t>マスター テキストの書式設定</a:t>
-            </a:r>
-          </a:p>
-          <a:p>
-            <a:pPr lvl="1"/>
-            <a:r>
-              <a:rPr kumimoji="1" lang="ja-JP" altLang="en-US"/>
-              <a:t>第 </a:t>
-            </a:r>
-            <a:r>
-              <a:rPr kumimoji="1" lang="en-US" altLang="ja-JP"/>
-              <a:t>2 </a:t>
-            </a:r>
-            <a:r>
-              <a:rPr kumimoji="1" lang="ja-JP" altLang="en-US"/>
-              <a:t>レベル</a:t>
-            </a:r>
-          </a:p>
-          <a:p>
-            <a:pPr lvl="2"/>
-            <a:r>
-              <a:rPr kumimoji="1" lang="ja-JP" altLang="en-US"/>
-              <a:t>第 </a:t>
-            </a:r>
-            <a:r>
-              <a:rPr kumimoji="1" lang="en-US" altLang="ja-JP"/>
-              <a:t>3 </a:t>
-            </a:r>
-            <a:r>
-              <a:rPr kumimoji="1" lang="ja-JP" altLang="en-US"/>
-              <a:t>レベル</a:t>
-            </a:r>
-          </a:p>
-          <a:p>
-            <a:pPr lvl="3"/>
-            <a:r>
-              <a:rPr kumimoji="1" lang="ja-JP" altLang="en-US"/>
-              <a:t>第 </a:t>
-            </a:r>
-            <a:r>
-              <a:rPr kumimoji="1" lang="en-US" altLang="ja-JP"/>
-              <a:t>4 </a:t>
-            </a:r>
-            <a:r>
-              <a:rPr kumimoji="1" lang="ja-JP" altLang="en-US"/>
-              <a:t>レベル</a:t>
-            </a:r>
-          </a:p>
-          <a:p>
-            <a:pPr lvl="4"/>
-            <a:r>
-              <a:rPr kumimoji="1" lang="ja-JP" altLang="en-US"/>
-              <a:t>第 </a:t>
-            </a:r>
-            <a:r>
-              <a:rPr kumimoji="1" lang="en-US" altLang="ja-JP"/>
-              <a:t>5 </a:t>
-            </a:r>
-            <a:r>
-              <a:rPr kumimoji="1" lang="ja-JP" altLang="en-US"/>
-              <a:t>レベル</a:t>
-            </a:r>
-          </a:p>
-        </p:txBody>
-      </p:sp>
-      <p:sp>
-        <p:nvSpPr>
-          <p:cNvPr id="7" name="日付プレースホルダー 6">
-            <a:extLst>
-              <a:ext uri="{FF2B5EF4-FFF2-40B4-BE49-F238E27FC236}">
-                <a16:creationId xmlns:a16="http://schemas.microsoft.com/office/drawing/2014/main" id="{B4F81492-847C-EE97-CE4E-E34C2A9E0BA0}"/>
-              </a:ext>
-            </a:extLst>
-          </p:cNvPr>
-          <p:cNvSpPr>
-            <a:spLocks noGrp="1"/>
-          </p:cNvSpPr>
-          <p:nvPr>
-            <p:ph type="dt" sz="half" idx="10"/>
-          </p:nvPr>
-        </p:nvSpPr>
-        <p:spPr/>
-        <p:txBody>
-          <a:bodyPr/>
-          <a:lstStyle/>
-          <a:p>
-            <a:fld id="{E3EFBC31-9ECA-48C0-910F-E09377915FB8}" type="datetimeFigureOut">
-              <a:rPr kumimoji="1" lang="ja-JP" altLang="en-US" smtClean="0"/>
-              <a:t>2026/7/5</a:t>
-            </a:fld>
-            <a:endParaRPr kumimoji="1" lang="ja-JP" altLang="en-US"/>
-          </a:p>
-        </p:txBody>
-      </p:sp>
-      <p:sp>
-        <p:nvSpPr>
-          <p:cNvPr id="8" name="フッター プレースホルダー 7">
-            <a:extLst>
-              <a:ext uri="{FF2B5EF4-FFF2-40B4-BE49-F238E27FC236}">
-                <a16:creationId xmlns:a16="http://schemas.microsoft.com/office/drawing/2014/main" id="{508207F7-1FE0-73EF-D402-872A8833CAEE}"/>
-              </a:ext>
-            </a:extLst>
-          </p:cNvPr>
-          <p:cNvSpPr>
-            <a:spLocks noGrp="1"/>
-          </p:cNvSpPr>
-          <p:nvPr>
-            <p:ph type="ftr" sz="quarter" idx="11"/>
-          </p:nvPr>
-        </p:nvSpPr>
-        <p:spPr/>
-        <p:txBody>
-          <a:bodyPr/>
-          <a:lstStyle/>
-          <a:p>
-            <a:endParaRPr kumimoji="1" lang="ja-JP" altLang="en-US"/>
-          </a:p>
-        </p:txBody>
-      </p:sp>
-      <p:sp>
-        <p:nvSpPr>
-          <p:cNvPr id="9" name="スライド番号プレースホルダー 8">
-            <a:extLst>
-              <a:ext uri="{FF2B5EF4-FFF2-40B4-BE49-F238E27FC236}">
-                <a16:creationId xmlns:a16="http://schemas.microsoft.com/office/drawing/2014/main" id="{8F6F3EF7-641F-90DB-332E-E52417E39F7B}"/>
-              </a:ext>
-            </a:extLst>
-          </p:cNvPr>
-          <p:cNvSpPr>
-            <a:spLocks noGrp="1"/>
-          </p:cNvSpPr>
-          <p:nvPr>
-            <p:ph type="sldNum" sz="quarter" idx="12"/>
-          </p:nvPr>
-        </p:nvSpPr>
-        <p:spPr/>
-        <p:txBody>
-          <a:bodyPr/>
-          <a:lstStyle/>
-          <a:p>
-            <a:fld id="{9EBFBC76-F46F-4ADD-8228-9529630895ED}" type="slidenum">
-              <a:rPr kumimoji="1" lang="ja-JP" altLang="en-US" smtClean="0"/>
-              <a:t>‹#›</a:t>
-            </a:fld>
-            <a:endParaRPr kumimoji="1" lang="ja-JP" altLang="en-US"/>
-          </a:p>
-        </p:txBody>
-      </p:sp>
-    </p:spTree>
-    <p:extLst>
-      <p:ext uri="{BB962C8B-B14F-4D97-AF65-F5344CB8AC3E}">
-        <p14:creationId xmlns:p14="http://schemas.microsoft.com/office/powerpoint/2010/main" val="1465333793"/>
-      </p:ext>
-    </p:extLst>
-  </p:cSld>
-  <p:clrMapOvr>
-    <a:masterClrMapping/>
-  </p:clrMapOvr>
-</p:sldLayout>
-</file>
-
-<file path=ppt/slideLayouts/slideLayout6.xml><?xml version="1.0" encoding="utf-8"?>
-<p:sldLayout xmlns:a="http://schemas.openxmlformats.org/drawingml/2006/main" xmlns:r="http://schemas.openxmlformats.org/officeDocument/2006/relationships" xmlns:p="http://schemas.openxmlformats.org/presentationml/2006/main" type="titleOnly" preserve="1">
-  <p:cSld name="タイトルのみ">
-    <p:spTree>
-      <p:nvGrpSpPr>
-        <p:cNvPr id="1" name=""/>
-        <p:cNvGrpSpPr/>
-        <p:nvPr/>
-      </p:nvGrpSpPr>
-      <p:grpSpPr>
-        <a:xfrm>
-          <a:off x="0" y="0"/>
-          <a:ext cx="0" cy="0"/>
-          <a:chOff x="0" y="0"/>
-          <a:chExt cx="0" cy="0"/>
-        </a:xfrm>
-      </p:grpSpPr>
-      <p:sp>
-        <p:nvSpPr>
-          <p:cNvPr id="2" name="タイトル 1">
-            <a:extLst>
-              <a:ext uri="{FF2B5EF4-FFF2-40B4-BE49-F238E27FC236}">
-                <a16:creationId xmlns:a16="http://schemas.microsoft.com/office/drawing/2014/main" id="{0533C488-7001-3614-BBDB-52F57B051E21}"/>
-              </a:ext>
-            </a:extLst>
-          </p:cNvPr>
-          <p:cNvSpPr>
-            <a:spLocks noGrp="1"/>
-          </p:cNvSpPr>
-          <p:nvPr>
-            <p:ph type="title"/>
-          </p:nvPr>
-        </p:nvSpPr>
-        <p:spPr/>
-        <p:txBody>
-          <a:bodyPr/>
-          <a:lstStyle/>
-          <a:p>
-            <a:r>
-              <a:rPr kumimoji="1" lang="ja-JP" altLang="en-US"/>
-              <a:t>マスター タイトルの書式設定</a:t>
-            </a:r>
-          </a:p>
-        </p:txBody>
-      </p:sp>
-      <p:sp>
-        <p:nvSpPr>
-          <p:cNvPr id="3" name="日付プレースホルダー 2">
-            <a:extLst>
-              <a:ext uri="{FF2B5EF4-FFF2-40B4-BE49-F238E27FC236}">
-                <a16:creationId xmlns:a16="http://schemas.microsoft.com/office/drawing/2014/main" id="{67F87A66-C96C-D4FF-9241-9CE679FE2AA9}"/>
-              </a:ext>
-            </a:extLst>
-          </p:cNvPr>
-          <p:cNvSpPr>
-            <a:spLocks noGrp="1"/>
-          </p:cNvSpPr>
-          <p:nvPr>
-            <p:ph type="dt" sz="half" idx="10"/>
-          </p:nvPr>
-        </p:nvSpPr>
-        <p:spPr/>
-        <p:txBody>
-          <a:bodyPr/>
-          <a:lstStyle/>
-          <a:p>
-            <a:fld id="{E3EFBC31-9ECA-48C0-910F-E09377915FB8}" type="datetimeFigureOut">
-              <a:rPr kumimoji="1" lang="ja-JP" altLang="en-US" smtClean="0"/>
-              <a:t>2026/7/5</a:t>
-            </a:fld>
-            <a:endParaRPr kumimoji="1" lang="ja-JP" altLang="en-US"/>
-          </a:p>
-        </p:txBody>
-      </p:sp>
-      <p:sp>
-        <p:nvSpPr>
-          <p:cNvPr id="4" name="フッター プレースホルダー 3">
-            <a:extLst>
-              <a:ext uri="{FF2B5EF4-FFF2-40B4-BE49-F238E27FC236}">
-                <a16:creationId xmlns:a16="http://schemas.microsoft.com/office/drawing/2014/main" id="{93116E27-0034-7717-9FEE-82777DE206A0}"/>
-              </a:ext>
-            </a:extLst>
-          </p:cNvPr>
-          <p:cNvSpPr>
-            <a:spLocks noGrp="1"/>
-          </p:cNvSpPr>
-          <p:nvPr>
-            <p:ph type="ftr" sz="quarter" idx="11"/>
-          </p:nvPr>
-        </p:nvSpPr>
-        <p:spPr/>
-        <p:txBody>
-          <a:bodyPr/>
-          <a:lstStyle/>
-          <a:p>
-            <a:endParaRPr kumimoji="1" lang="ja-JP" altLang="en-US"/>
-          </a:p>
-        </p:txBody>
-      </p:sp>
-      <p:sp>
-        <p:nvSpPr>
-          <p:cNvPr id="5" name="スライド番号プレースホルダー 4">
-            <a:extLst>
-              <a:ext uri="{FF2B5EF4-FFF2-40B4-BE49-F238E27FC236}">
-                <a16:creationId xmlns:a16="http://schemas.microsoft.com/office/drawing/2014/main" id="{B21BDC13-BC57-56EC-7696-822A94E13DCA}"/>
-              </a:ext>
-            </a:extLst>
-          </p:cNvPr>
-          <p:cNvSpPr>
-            <a:spLocks noGrp="1"/>
-          </p:cNvSpPr>
-          <p:nvPr>
-            <p:ph type="sldNum" sz="quarter" idx="12"/>
-          </p:nvPr>
-        </p:nvSpPr>
-        <p:spPr/>
-        <p:txBody>
-          <a:bodyPr/>
-          <a:lstStyle/>
-          <a:p>
-            <a:fld id="{9EBFBC76-F46F-4ADD-8228-9529630895ED}" type="slidenum">
-              <a:rPr kumimoji="1" lang="ja-JP" altLang="en-US" smtClean="0"/>
-              <a:t>‹#›</a:t>
-            </a:fld>
-            <a:endParaRPr kumimoji="1" lang="ja-JP" altLang="en-US"/>
-          </a:p>
-        </p:txBody>
-      </p:sp>
-    </p:spTree>
-    <p:extLst>
-      <p:ext uri="{BB962C8B-B14F-4D97-AF65-F5344CB8AC3E}">
-        <p14:creationId xmlns:p14="http://schemas.microsoft.com/office/powerpoint/2010/main" val="3285570792"/>
-      </p:ext>
-    </p:extLst>
-  </p:cSld>
-  <p:clrMapOvr>
-    <a:masterClrMapping/>
-  </p:clrMapOvr>
-</p:sldLayout>
-</file>
-
-<file path=ppt/slideLayouts/slideLayout7.xml><?xml version="1.0" encoding="utf-8"?>
-<p:sldLayout xmlns:a="http://schemas.openxmlformats.org/drawingml/2006/main" xmlns:r="http://schemas.openxmlformats.org/officeDocument/2006/relationships" xmlns:p="http://schemas.openxmlformats.org/presentationml/2006/main" type="blank" preserve="1">
-  <p:cSld name="白紙">
-    <p:spTree>
-      <p:nvGrpSpPr>
-        <p:cNvPr id="1" name=""/>
-        <p:cNvGrpSpPr/>
-        <p:nvPr/>
-      </p:nvGrpSpPr>
-      <p:grpSpPr>
-        <a:xfrm>
-          <a:off x="0" y="0"/>
-          <a:ext cx="0" cy="0"/>
-          <a:chOff x="0" y="0"/>
-          <a:chExt cx="0" cy="0"/>
-        </a:xfrm>
-      </p:grpSpPr>
-      <p:sp>
-        <p:nvSpPr>
-          <p:cNvPr id="2" name="日付プレースホルダー 1">
-            <a:extLst>
-              <a:ext uri="{FF2B5EF4-FFF2-40B4-BE49-F238E27FC236}">
-                <a16:creationId xmlns:a16="http://schemas.microsoft.com/office/drawing/2014/main" id="{2C96747D-199C-DB70-796B-D7AD9498DAAD}"/>
-              </a:ext>
-            </a:extLst>
-          </p:cNvPr>
-          <p:cNvSpPr>
-            <a:spLocks noGrp="1"/>
-          </p:cNvSpPr>
-          <p:nvPr>
-            <p:ph type="dt" sz="half" idx="10"/>
-          </p:nvPr>
-        </p:nvSpPr>
-        <p:spPr/>
-        <p:txBody>
-          <a:bodyPr/>
-          <a:lstStyle/>
-          <a:p>
-            <a:fld id="{E3EFBC31-9ECA-48C0-910F-E09377915FB8}" type="datetimeFigureOut">
-              <a:rPr kumimoji="1" lang="ja-JP" altLang="en-US" smtClean="0"/>
-              <a:t>2026/7/5</a:t>
-            </a:fld>
-            <a:endParaRPr kumimoji="1" lang="ja-JP" altLang="en-US"/>
-          </a:p>
-        </p:txBody>
-      </p:sp>
-      <p:sp>
-        <p:nvSpPr>
-          <p:cNvPr id="3" name="フッター プレースホルダー 2">
-            <a:extLst>
-              <a:ext uri="{FF2B5EF4-FFF2-40B4-BE49-F238E27FC236}">
-                <a16:creationId xmlns:a16="http://schemas.microsoft.com/office/drawing/2014/main" id="{D95DF319-00BA-725F-BC6A-27C0CA6C687A}"/>
-              </a:ext>
-            </a:extLst>
-          </p:cNvPr>
-          <p:cNvSpPr>
-            <a:spLocks noGrp="1"/>
-          </p:cNvSpPr>
-          <p:nvPr>
-            <p:ph type="ftr" sz="quarter" idx="11"/>
-          </p:nvPr>
-        </p:nvSpPr>
-        <p:spPr/>
-        <p:txBody>
-          <a:bodyPr/>
-          <a:lstStyle/>
-          <a:p>
-            <a:endParaRPr kumimoji="1" lang="ja-JP" altLang="en-US"/>
-          </a:p>
-        </p:txBody>
-      </p:sp>
-      <p:sp>
-        <p:nvSpPr>
-          <p:cNvPr id="4" name="スライド番号プレースホルダー 3">
-            <a:extLst>
-              <a:ext uri="{FF2B5EF4-FFF2-40B4-BE49-F238E27FC236}">
-                <a16:creationId xmlns:a16="http://schemas.microsoft.com/office/drawing/2014/main" id="{F3F24241-0D68-5DC6-E45A-B7BBC9246733}"/>
-              </a:ext>
-            </a:extLst>
-          </p:cNvPr>
-          <p:cNvSpPr>
-            <a:spLocks noGrp="1"/>
-          </p:cNvSpPr>
-          <p:nvPr>
-            <p:ph type="sldNum" sz="quarter" idx="12"/>
-          </p:nvPr>
-        </p:nvSpPr>
-        <p:spPr/>
-        <p:txBody>
-          <a:bodyPr/>
-          <a:lstStyle/>
-          <a:p>
-            <a:fld id="{9EBFBC76-F46F-4ADD-8228-9529630895ED}" type="slidenum">
-              <a:rPr kumimoji="1" lang="ja-JP" altLang="en-US" smtClean="0"/>
-              <a:t>‹#›</a:t>
-            </a:fld>
-            <a:endParaRPr kumimoji="1" lang="ja-JP" altLang="en-US"/>
-          </a:p>
-        </p:txBody>
-      </p:sp>
-    </p:spTree>
-    <p:extLst>
-      <p:ext uri="{BB962C8B-B14F-4D97-AF65-F5344CB8AC3E}">
-        <p14:creationId xmlns:p14="http://schemas.microsoft.com/office/powerpoint/2010/main" val="1924275464"/>
-      </p:ext>
-    </p:extLst>
-  </p:cSld>
-  <p:clrMapOvr>
-    <a:masterClrMapping/>
-  </p:clrMapOvr>
-</p:sldLayout>
-</file>
-
-<file path=ppt/slideLayouts/slideLayout8.xml><?xml version="1.0" encoding="utf-8"?>
-<p:sldLayout xmlns:a="http://schemas.openxmlformats.org/drawingml/2006/main" xmlns:r="http://schemas.openxmlformats.org/officeDocument/2006/relationships" xmlns:p="http://schemas.openxmlformats.org/presentationml/2006/main" type="objTx" preserve="1">
-  <p:cSld name="タイトル付きのコンテンツ">
-    <p:spTree>
-      <p:nvGrpSpPr>
-        <p:cNvPr id="1" name=""/>
-        <p:cNvGrpSpPr/>
-        <p:nvPr/>
-      </p:nvGrpSpPr>
-      <p:grpSpPr>
-        <a:xfrm>
-          <a:off x="0" y="0"/>
-          <a:ext cx="0" cy="0"/>
-          <a:chOff x="0" y="0"/>
-          <a:chExt cx="0" cy="0"/>
-        </a:xfrm>
-      </p:grpSpPr>
-      <p:sp>
-        <p:nvSpPr>
-          <p:cNvPr id="2" name="タイトル 1">
-            <a:extLst>
-              <a:ext uri="{FF2B5EF4-FFF2-40B4-BE49-F238E27FC236}">
-                <a16:creationId xmlns:a16="http://schemas.microsoft.com/office/drawing/2014/main" id="{6583C645-DBBF-EBC8-73A4-9590C9AA4578}"/>
-              </a:ext>
-            </a:extLst>
-          </p:cNvPr>
-          <p:cNvSpPr>
-            <a:spLocks noGrp="1"/>
-          </p:cNvSpPr>
-          <p:nvPr>
-            <p:ph type="title"/>
-          </p:nvPr>
-        </p:nvSpPr>
-        <p:spPr>
-          <a:xfrm>
-            <a:off x="839788" y="457200"/>
-            <a:ext cx="3932237" cy="1600200"/>
-          </a:xfrm>
-        </p:spPr>
-        <p:txBody>
-          <a:bodyPr anchor="b"/>
-          <a:lstStyle>
-            <a:lvl1pPr>
-              <a:defRPr sz="3200"/>
-            </a:lvl1pPr>
-          </a:lstStyle>
-          <a:p>
-            <a:r>
-              <a:rPr kumimoji="1" lang="ja-JP" altLang="en-US"/>
-              <a:t>マスター タイトルの書式設定</a:t>
-            </a:r>
-          </a:p>
-        </p:txBody>
-      </p:sp>
-      <p:sp>
-        <p:nvSpPr>
-          <p:cNvPr id="3" name="コンテンツ プレースホルダー 2">
-            <a:extLst>
-              <a:ext uri="{FF2B5EF4-FFF2-40B4-BE49-F238E27FC236}">
-                <a16:creationId xmlns:a16="http://schemas.microsoft.com/office/drawing/2014/main" id="{2981406B-DD2E-D5D3-AE10-E0AB4E154E5A}"/>
-              </a:ext>
-            </a:extLst>
-          </p:cNvPr>
-          <p:cNvSpPr>
-            <a:spLocks noGrp="1"/>
-          </p:cNvSpPr>
-          <p:nvPr>
-            <p:ph idx="1"/>
-          </p:nvPr>
-        </p:nvSpPr>
-        <p:spPr>
-          <a:xfrm>
-            <a:off x="5183188" y="987425"/>
-            <a:ext cx="6172200" cy="4873625"/>
-          </a:xfrm>
-        </p:spPr>
-        <p:txBody>
-          <a:bodyPr/>
-          <a:lstStyle>
-            <a:lvl1pPr>
-              <a:defRPr sz="3200"/>
-            </a:lvl1pPr>
-            <a:lvl2pPr>
-              <a:defRPr sz="2800"/>
-            </a:lvl2pPr>
-            <a:lvl3pPr>
-              <a:defRPr sz="2400"/>
-            </a:lvl3pPr>
-            <a:lvl4pPr>
-              <a:defRPr sz="2000"/>
-            </a:lvl4pPr>
-            <a:lvl5pPr>
-              <a:defRPr sz="2000"/>
-            </a:lvl5pPr>
-            <a:lvl6pPr>
-              <a:defRPr sz="2000"/>
-            </a:lvl6pPr>
-            <a:lvl7pPr>
-              <a:defRPr sz="2000"/>
-            </a:lvl7pPr>
-            <a:lvl8pPr>
-              <a:defRPr sz="2000"/>
-            </a:lvl8pPr>
-            <a:lvl9pPr>
-              <a:defRPr sz="2000"/>
-            </a:lvl9pPr>
-          </a:lstStyle>
-          <a:p>
-            <a:pPr lvl="0"/>
-            <a:r>
-              <a:rPr kumimoji="1" lang="ja-JP" altLang="en-US"/>
-              <a:t>マスター テキストの書式設定</a:t>
-            </a:r>
-          </a:p>
-          <a:p>
-            <a:pPr lvl="1"/>
-            <a:r>
-              <a:rPr kumimoji="1" lang="ja-JP" altLang="en-US"/>
-              <a:t>第 </a:t>
-            </a:r>
-            <a:r>
-              <a:rPr kumimoji="1" lang="en-US" altLang="ja-JP"/>
-              <a:t>2 </a:t>
-            </a:r>
-            <a:r>
-              <a:rPr kumimoji="1" lang="ja-JP" altLang="en-US"/>
-              <a:t>レベル</a:t>
-            </a:r>
-          </a:p>
-          <a:p>
-            <a:pPr lvl="2"/>
-            <a:r>
-              <a:rPr kumimoji="1" lang="ja-JP" altLang="en-US"/>
-              <a:t>第 </a:t>
-            </a:r>
-            <a:r>
-              <a:rPr kumimoji="1" lang="en-US" altLang="ja-JP"/>
-              <a:t>3 </a:t>
-            </a:r>
-            <a:r>
-              <a:rPr kumimoji="1" lang="ja-JP" altLang="en-US"/>
-              <a:t>レベル</a:t>
-            </a:r>
-          </a:p>
-          <a:p>
-            <a:pPr lvl="3"/>
-            <a:r>
-              <a:rPr kumimoji="1" lang="ja-JP" altLang="en-US"/>
-              <a:t>第 </a:t>
-            </a:r>
-            <a:r>
-              <a:rPr kumimoji="1" lang="en-US" altLang="ja-JP"/>
-              <a:t>4 </a:t>
-            </a:r>
-            <a:r>
-              <a:rPr kumimoji="1" lang="ja-JP" altLang="en-US"/>
-              <a:t>レベル</a:t>
-            </a:r>
-          </a:p>
-          <a:p>
-            <a:pPr lvl="4"/>
-            <a:r>
-              <a:rPr kumimoji="1" lang="ja-JP" altLang="en-US"/>
-              <a:t>第 </a:t>
-            </a:r>
-            <a:r>
-              <a:rPr kumimoji="1" lang="en-US" altLang="ja-JP"/>
-              <a:t>5 </a:t>
-            </a:r>
-            <a:r>
-              <a:rPr kumimoji="1" lang="ja-JP" altLang="en-US"/>
-              <a:t>レベル</a:t>
-            </a:r>
-          </a:p>
-        </p:txBody>
-      </p:sp>
-      <p:sp>
-        <p:nvSpPr>
-          <p:cNvPr id="4" name="テキスト プレースホルダー 3">
-            <a:extLst>
-              <a:ext uri="{FF2B5EF4-FFF2-40B4-BE49-F238E27FC236}">
-                <a16:creationId xmlns:a16="http://schemas.microsoft.com/office/drawing/2014/main" id="{E11620FD-5FFA-4826-B001-35BBC49CA67D}"/>
-              </a:ext>
-            </a:extLst>
-          </p:cNvPr>
-          <p:cNvSpPr>
-            <a:spLocks noGrp="1"/>
-          </p:cNvSpPr>
-          <p:nvPr>
-            <p:ph type="body" sz="half" idx="2"/>
-          </p:nvPr>
-        </p:nvSpPr>
-        <p:spPr>
-          <a:xfrm>
-            <a:off x="839788" y="2057400"/>
-            <a:ext cx="3932237" cy="3811588"/>
-          </a:xfrm>
-        </p:spPr>
-        <p:txBody>
-          <a:bodyPr/>
-          <a:lstStyle>
-            <a:lvl1pPr marL="0" indent="0">
-              <a:buNone/>
-              <a:defRPr sz="1600"/>
-            </a:lvl1pPr>
-            <a:lvl2pPr marL="457200" indent="0">
-              <a:buNone/>
-              <a:defRPr sz="1400"/>
-            </a:lvl2pPr>
-            <a:lvl3pPr marL="914400" indent="0">
-              <a:buNone/>
-              <a:defRPr sz="1200"/>
-            </a:lvl3pPr>
-            <a:lvl4pPr marL="1371600" indent="0">
-              <a:buNone/>
-              <a:defRPr sz="1000"/>
-            </a:lvl4pPr>
-            <a:lvl5pPr marL="1828800" indent="0">
-              <a:buNone/>
-              <a:defRPr sz="1000"/>
-            </a:lvl5pPr>
-            <a:lvl6pPr marL="2286000" indent="0">
-              <a:buNone/>
-              <a:defRPr sz="1000"/>
-            </a:lvl6pPr>
-            <a:lvl7pPr marL="2743200" indent="0">
-              <a:buNone/>
-              <a:defRPr sz="1000"/>
-            </a:lvl7pPr>
-            <a:lvl8pPr marL="3200400" indent="0">
-              <a:buNone/>
-              <a:defRPr sz="1000"/>
-            </a:lvl8pPr>
-            <a:lvl9pPr marL="3657600" indent="0">
-              <a:buNone/>
-              <a:defRPr sz="1000"/>
-            </a:lvl9pPr>
-          </a:lstStyle>
-          <a:p>
-            <a:pPr lvl="0"/>
-            <a:r>
-              <a:rPr kumimoji="1" lang="ja-JP" altLang="en-US"/>
-              <a:t>マスター テキストの書式設定</a:t>
-            </a:r>
-          </a:p>
-        </p:txBody>
-      </p:sp>
-      <p:sp>
-        <p:nvSpPr>
-          <p:cNvPr id="5" name="日付プレースホルダー 4">
-            <a:extLst>
-              <a:ext uri="{FF2B5EF4-FFF2-40B4-BE49-F238E27FC236}">
-                <a16:creationId xmlns:a16="http://schemas.microsoft.com/office/drawing/2014/main" id="{A0484110-46BB-014D-41FF-BB1422C973DB}"/>
-              </a:ext>
-            </a:extLst>
-          </p:cNvPr>
-          <p:cNvSpPr>
-            <a:spLocks noGrp="1"/>
-          </p:cNvSpPr>
-          <p:nvPr>
-            <p:ph type="dt" sz="half" idx="10"/>
-          </p:nvPr>
-        </p:nvSpPr>
-        <p:spPr/>
-        <p:txBody>
-          <a:bodyPr/>
-          <a:lstStyle/>
-          <a:p>
-            <a:fld id="{E3EFBC31-9ECA-48C0-910F-E09377915FB8}" type="datetimeFigureOut">
-              <a:rPr kumimoji="1" lang="ja-JP" altLang="en-US" smtClean="0"/>
-              <a:t>2026/7/5</a:t>
-            </a:fld>
-            <a:endParaRPr kumimoji="1" lang="ja-JP" altLang="en-US"/>
-          </a:p>
-        </p:txBody>
-      </p:sp>
-      <p:sp>
-        <p:nvSpPr>
-          <p:cNvPr id="6" name="フッター プレースホルダー 5">
-            <a:extLst>
-              <a:ext uri="{FF2B5EF4-FFF2-40B4-BE49-F238E27FC236}">
-                <a16:creationId xmlns:a16="http://schemas.microsoft.com/office/drawing/2014/main" id="{D0568A18-5ED2-ABB4-0951-B33EF4C593EA}"/>
-              </a:ext>
-            </a:extLst>
-          </p:cNvPr>
-          <p:cNvSpPr>
-            <a:spLocks noGrp="1"/>
-          </p:cNvSpPr>
-          <p:nvPr>
-            <p:ph type="ftr" sz="quarter" idx="11"/>
-          </p:nvPr>
-        </p:nvSpPr>
-        <p:spPr/>
-        <p:txBody>
-          <a:bodyPr/>
-          <a:lstStyle/>
-          <a:p>
-            <a:endParaRPr kumimoji="1" lang="ja-JP" altLang="en-US"/>
-          </a:p>
-        </p:txBody>
-      </p:sp>
-      <p:sp>
-        <p:nvSpPr>
-          <p:cNvPr id="7" name="スライド番号プレースホルダー 6">
-            <a:extLst>
-              <a:ext uri="{FF2B5EF4-FFF2-40B4-BE49-F238E27FC236}">
-                <a16:creationId xmlns:a16="http://schemas.microsoft.com/office/drawing/2014/main" id="{C85EACC3-A6F9-B01D-47D1-98D369617A11}"/>
-              </a:ext>
-            </a:extLst>
-          </p:cNvPr>
-          <p:cNvSpPr>
-            <a:spLocks noGrp="1"/>
-          </p:cNvSpPr>
-          <p:nvPr>
-            <p:ph type="sldNum" sz="quarter" idx="12"/>
-          </p:nvPr>
-        </p:nvSpPr>
-        <p:spPr/>
-        <p:txBody>
-          <a:bodyPr/>
-          <a:lstStyle/>
-          <a:p>
-            <a:fld id="{9EBFBC76-F46F-4ADD-8228-9529630895ED}" type="slidenum">
-              <a:rPr kumimoji="1" lang="ja-JP" altLang="en-US" smtClean="0"/>
-              <a:t>‹#›</a:t>
-            </a:fld>
-            <a:endParaRPr kumimoji="1" lang="ja-JP" altLang="en-US"/>
-          </a:p>
-        </p:txBody>
-      </p:sp>
-    </p:spTree>
-    <p:extLst>
-      <p:ext uri="{BB962C8B-B14F-4D97-AF65-F5344CB8AC3E}">
-        <p14:creationId xmlns:p14="http://schemas.microsoft.com/office/powerpoint/2010/main" val="783369085"/>
-      </p:ext>
-    </p:extLst>
-  </p:cSld>
-  <p:clrMapOvr>
-    <a:masterClrMapping/>
-  </p:clrMapOvr>
-</p:sldLayout>
-</file>
-
-<file path=ppt/slideLayouts/slideLayout9.xml><?xml version="1.0" encoding="utf-8"?>
-<p:sldLayout xmlns:a="http://schemas.openxmlformats.org/drawingml/2006/main" xmlns:r="http://schemas.openxmlformats.org/officeDocument/2006/relationships" xmlns:p="http://schemas.openxmlformats.org/presentationml/2006/main" type="picTx" preserve="1">
-  <p:cSld name="タイトル付きの図">
-    <p:spTree>
-      <p:nvGrpSpPr>
-        <p:cNvPr id="1" name=""/>
-        <p:cNvGrpSpPr/>
-        <p:nvPr/>
-      </p:nvGrpSpPr>
-      <p:grpSpPr>
-        <a:xfrm>
-          <a:off x="0" y="0"/>
-          <a:ext cx="0" cy="0"/>
-          <a:chOff x="0" y="0"/>
-          <a:chExt cx="0" cy="0"/>
-        </a:xfrm>
-      </p:grpSpPr>
-      <p:sp>
-        <p:nvSpPr>
-          <p:cNvPr id="2" name="タイトル 1">
-            <a:extLst>
-              <a:ext uri="{FF2B5EF4-FFF2-40B4-BE49-F238E27FC236}">
-                <a16:creationId xmlns:a16="http://schemas.microsoft.com/office/drawing/2014/main" id="{10E69773-B60F-F99E-7259-84C025920DA5}"/>
-              </a:ext>
-            </a:extLst>
-          </p:cNvPr>
-          <p:cNvSpPr>
-            <a:spLocks noGrp="1"/>
-          </p:cNvSpPr>
-          <p:nvPr>
-            <p:ph type="title"/>
-          </p:nvPr>
-        </p:nvSpPr>
-        <p:spPr>
-          <a:xfrm>
-            <a:off x="839788" y="457200"/>
-            <a:ext cx="3932237" cy="1600200"/>
-          </a:xfrm>
-        </p:spPr>
-        <p:txBody>
-          <a:bodyPr anchor="b"/>
-          <a:lstStyle>
-            <a:lvl1pPr>
-              <a:defRPr sz="3200"/>
-            </a:lvl1pPr>
-          </a:lstStyle>
-          <a:p>
-            <a:r>
-              <a:rPr kumimoji="1" lang="ja-JP" altLang="en-US"/>
-              <a:t>マスター タイトルの書式設定</a:t>
-            </a:r>
-          </a:p>
-        </p:txBody>
-      </p:sp>
-      <p:sp>
-        <p:nvSpPr>
-          <p:cNvPr id="3" name="図プレースホルダー 2">
-            <a:extLst>
-              <a:ext uri="{FF2B5EF4-FFF2-40B4-BE49-F238E27FC236}">
-                <a16:creationId xmlns:a16="http://schemas.microsoft.com/office/drawing/2014/main" id="{2492595E-8F9F-0A64-3DEB-8E74E0AC3E93}"/>
-              </a:ext>
-            </a:extLst>
-          </p:cNvPr>
-          <p:cNvSpPr>
-            <a:spLocks noGrp="1"/>
-          </p:cNvSpPr>
-          <p:nvPr>
-            <p:ph type="pic" idx="1"/>
-          </p:nvPr>
-        </p:nvSpPr>
-        <p:spPr>
-          <a:xfrm>
-            <a:off x="5183188" y="987425"/>
-            <a:ext cx="6172200" cy="4873625"/>
-          </a:xfrm>
-        </p:spPr>
-        <p:txBody>
-          <a:bodyPr/>
-          <a:lstStyle>
-            <a:lvl1pPr marL="0" indent="0">
-              <a:buNone/>
-              <a:defRPr sz="3200"/>
-            </a:lvl1pPr>
-            <a:lvl2pPr marL="457200" indent="0">
-              <a:buNone/>
-              <a:defRPr sz="2800"/>
-            </a:lvl2pPr>
-            <a:lvl3pPr marL="914400" indent="0">
-              <a:buNone/>
-              <a:defRPr sz="2400"/>
-            </a:lvl3pPr>
-            <a:lvl4pPr marL="1371600" indent="0">
-              <a:buNone/>
-              <a:defRPr sz="2000"/>
-            </a:lvl4pPr>
-            <a:lvl5pPr marL="1828800" indent="0">
-              <a:buNone/>
-              <a:defRPr sz="2000"/>
-            </a:lvl5pPr>
-            <a:lvl6pPr marL="2286000" indent="0">
-              <a:buNone/>
-              <a:defRPr sz="2000"/>
-            </a:lvl6pPr>
-            <a:lvl7pPr marL="2743200" indent="0">
-              <a:buNone/>
-              <a:defRPr sz="2000"/>
-            </a:lvl7pPr>
-            <a:lvl8pPr marL="3200400" indent="0">
-              <a:buNone/>
-              <a:defRPr sz="2000"/>
-            </a:lvl8pPr>
-            <a:lvl9pPr marL="3657600" indent="0">
-              <a:buNone/>
-              <a:defRPr sz="2000"/>
-            </a:lvl9pPr>
-          </a:lstStyle>
-          <a:p>
-            <a:endParaRPr kumimoji="1" lang="ja-JP" altLang="en-US"/>
-          </a:p>
-        </p:txBody>
-      </p:sp>
-      <p:sp>
-        <p:nvSpPr>
-          <p:cNvPr id="4" name="テキスト プレースホルダー 3">
-            <a:extLst>
-              <a:ext uri="{FF2B5EF4-FFF2-40B4-BE49-F238E27FC236}">
-                <a16:creationId xmlns:a16="http://schemas.microsoft.com/office/drawing/2014/main" id="{20BCF0B5-1DAA-A506-3226-5F5AAE8E2214}"/>
-              </a:ext>
-            </a:extLst>
-          </p:cNvPr>
-          <p:cNvSpPr>
-            <a:spLocks noGrp="1"/>
-          </p:cNvSpPr>
-          <p:nvPr>
-            <p:ph type="body" sz="half" idx="2"/>
-          </p:nvPr>
-        </p:nvSpPr>
-        <p:spPr>
-          <a:xfrm>
-            <a:off x="839788" y="2057400"/>
-            <a:ext cx="3932237" cy="3811588"/>
-          </a:xfrm>
-        </p:spPr>
-        <p:txBody>
-          <a:bodyPr/>
-          <a:lstStyle>
-            <a:lvl1pPr marL="0" indent="0">
-              <a:buNone/>
-              <a:defRPr sz="1600"/>
-            </a:lvl1pPr>
-            <a:lvl2pPr marL="457200" indent="0">
-              <a:buNone/>
-              <a:defRPr sz="1400"/>
-            </a:lvl2pPr>
-            <a:lvl3pPr marL="914400" indent="0">
-              <a:buNone/>
-              <a:defRPr sz="1200"/>
-            </a:lvl3pPr>
-            <a:lvl4pPr marL="1371600" indent="0">
-              <a:buNone/>
-              <a:defRPr sz="1000"/>
-            </a:lvl4pPr>
-            <a:lvl5pPr marL="1828800" indent="0">
-              <a:buNone/>
-              <a:defRPr sz="1000"/>
-            </a:lvl5pPr>
-            <a:lvl6pPr marL="2286000" indent="0">
-              <a:buNone/>
-              <a:defRPr sz="1000"/>
-            </a:lvl6pPr>
-            <a:lvl7pPr marL="2743200" indent="0">
-              <a:buNone/>
-              <a:defRPr sz="1000"/>
-            </a:lvl7pPr>
-            <a:lvl8pPr marL="3200400" indent="0">
-              <a:buNone/>
-              <a:defRPr sz="1000"/>
-            </a:lvl8pPr>
-            <a:lvl9pPr marL="3657600" indent="0">
-              <a:buNone/>
-              <a:defRPr sz="1000"/>
-            </a:lvl9pPr>
-          </a:lstStyle>
-          <a:p>
-            <a:pPr lvl="0"/>
-            <a:r>
-              <a:rPr kumimoji="1" lang="ja-JP" altLang="en-US"/>
-              <a:t>マスター テキストの書式設定</a:t>
-            </a:r>
-          </a:p>
-        </p:txBody>
-      </p:sp>
-      <p:sp>
-        <p:nvSpPr>
-          <p:cNvPr id="5" name="日付プレースホルダー 4">
-            <a:extLst>
-              <a:ext uri="{FF2B5EF4-FFF2-40B4-BE49-F238E27FC236}">
-                <a16:creationId xmlns:a16="http://schemas.microsoft.com/office/drawing/2014/main" id="{07D2088E-9319-A7DB-F799-C26F55084C68}"/>
-              </a:ext>
-            </a:extLst>
-          </p:cNvPr>
-          <p:cNvSpPr>
-            <a:spLocks noGrp="1"/>
-          </p:cNvSpPr>
-          <p:nvPr>
-            <p:ph type="dt" sz="half" idx="10"/>
-          </p:nvPr>
-        </p:nvSpPr>
-        <p:spPr/>
-        <p:txBody>
-          <a:bodyPr/>
-          <a:lstStyle/>
-          <a:p>
-            <a:fld id="{E3EFBC31-9ECA-48C0-910F-E09377915FB8}" type="datetimeFigureOut">
-              <a:rPr kumimoji="1" lang="ja-JP" altLang="en-US" smtClean="0"/>
-              <a:t>2026/7/5</a:t>
-            </a:fld>
-            <a:endParaRPr kumimoji="1" lang="ja-JP" altLang="en-US"/>
-          </a:p>
-        </p:txBody>
-      </p:sp>
-      <p:sp>
-        <p:nvSpPr>
-          <p:cNvPr id="6" name="フッター プレースホルダー 5">
-            <a:extLst>
-              <a:ext uri="{FF2B5EF4-FFF2-40B4-BE49-F238E27FC236}">
-                <a16:creationId xmlns:a16="http://schemas.microsoft.com/office/drawing/2014/main" id="{A07741E9-DB06-1561-7A20-0A626D9DD42A}"/>
-              </a:ext>
-            </a:extLst>
-          </p:cNvPr>
-          <p:cNvSpPr>
-            <a:spLocks noGrp="1"/>
-          </p:cNvSpPr>
-          <p:nvPr>
-            <p:ph type="ftr" sz="quarter" idx="11"/>
-          </p:nvPr>
-        </p:nvSpPr>
-        <p:spPr/>
-        <p:txBody>
-          <a:bodyPr/>
-          <a:lstStyle/>
-          <a:p>
-            <a:endParaRPr kumimoji="1" lang="ja-JP" altLang="en-US"/>
-          </a:p>
-        </p:txBody>
-      </p:sp>
-      <p:sp>
-        <p:nvSpPr>
-          <p:cNvPr id="7" name="スライド番号プレースホルダー 6">
-            <a:extLst>
-              <a:ext uri="{FF2B5EF4-FFF2-40B4-BE49-F238E27FC236}">
-                <a16:creationId xmlns:a16="http://schemas.microsoft.com/office/drawing/2014/main" id="{FA71377C-7AF9-AAE2-2C83-B36C5B200143}"/>
-              </a:ext>
-            </a:extLst>
-          </p:cNvPr>
-          <p:cNvSpPr>
-            <a:spLocks noGrp="1"/>
-          </p:cNvSpPr>
-          <p:nvPr>
-            <p:ph type="sldNum" sz="quarter" idx="12"/>
-          </p:nvPr>
-        </p:nvSpPr>
-        <p:spPr/>
-        <p:txBody>
-          <a:bodyPr/>
-          <a:lstStyle/>
-          <a:p>
-            <a:fld id="{9EBFBC76-F46F-4ADD-8228-9529630895ED}" type="slidenum">
-              <a:rPr kumimoji="1" lang="ja-JP" altLang="en-US" smtClean="0"/>
-              <a:t>‹#›</a:t>
-            </a:fld>
-            <a:endParaRPr kumimoji="1" lang="ja-JP" altLang="en-US"/>
-          </a:p>
-        </p:txBody>
-      </p:sp>
-    </p:spTree>
-    <p:extLst>
-      <p:ext uri="{BB962C8B-B14F-4D97-AF65-F5344CB8AC3E}">
-        <p14:creationId xmlns:p14="http://schemas.microsoft.com/office/powerpoint/2010/main" val="3249773560"/>
       </p:ext>
     </p:extLst>
   </p:cSld>
@@ -3792,7 +1717,7 @@
             </a:lvl1pPr>
           </a:lstStyle>
           <a:p>
-            <a:fld id="{E3EFBC31-9ECA-48C0-910F-E09377915FB8}" type="datetimeFigureOut">
+            <a:fld id="{97F8AAFB-F628-45BC-B43F-2D63EBB42CAB}" type="datetime1">
               <a:rPr kumimoji="1" lang="ja-JP" altLang="en-US" smtClean="0"/>
               <a:t>2026/7/5</a:t>
             </a:fld>
@@ -3901,16 +1826,10 @@
   <p:sldLayoutIdLst>
     <p:sldLayoutId id="2147483649" r:id="rId1"/>
     <p:sldLayoutId id="2147483650" r:id="rId2"/>
-    <p:sldLayoutId id="2147483651" r:id="rId3"/>
-    <p:sldLayoutId id="2147483652" r:id="rId4"/>
-    <p:sldLayoutId id="2147483653" r:id="rId5"/>
-    <p:sldLayoutId id="2147483654" r:id="rId6"/>
-    <p:sldLayoutId id="2147483655" r:id="rId7"/>
-    <p:sldLayoutId id="2147483656" r:id="rId8"/>
-    <p:sldLayoutId id="2147483657" r:id="rId9"/>
-    <p:sldLayoutId id="2147483658" r:id="rId10"/>
-    <p:sldLayoutId id="2147483659" r:id="rId11"/>
+    <p:sldLayoutId id="2147483652" r:id="rId3"/>
+    <p:sldLayoutId id="2147483651" r:id="rId4"/>
   </p:sldLayoutIdLst>
+  <p:hf hdr="0" ftr="0" dt="0"/>
   <p:txStyles>
     <p:titleStyle>
       <a:lvl1pPr algn="l" defTabSz="914400" rtl="0" eaLnBrk="1" latinLnBrk="0" hangingPunct="1">
@@ -4264,10 +2183,40 @@
           </a:p>
         </p:txBody>
       </p:sp>
+      <p:sp>
+        <p:nvSpPr>
+          <p:cNvPr id="4" name="スライド番号プレースホルダー 3">
+            <a:extLst>
+              <a:ext uri="{FF2B5EF4-FFF2-40B4-BE49-F238E27FC236}">
+                <a16:creationId xmlns:a16="http://schemas.microsoft.com/office/drawing/2014/main" id="{A587D25B-4621-505E-7AAD-AD473A386F31}"/>
+              </a:ext>
+            </a:extLst>
+          </p:cNvPr>
+          <p:cNvSpPr>
+            <a:spLocks noGrp="1"/>
+          </p:cNvSpPr>
+          <p:nvPr>
+            <p:ph type="sldNum" sz="quarter" idx="12"/>
+          </p:nvPr>
+        </p:nvSpPr>
+        <p:spPr/>
+        <p:txBody>
+          <a:bodyPr/>
+          <a:lstStyle/>
+          <a:p>
+            <a:fld id="{9EBFBC76-F46F-4ADD-8228-9529630895ED}" type="slidenum">
+              <a:rPr lang="ja-JP" altLang="en-US" smtClean="0"/>
+              <a:pPr/>
+              <a:t>1</a:t>
+            </a:fld>
+            <a:endParaRPr lang="ja-JP" altLang="en-US" dirty="0"/>
+          </a:p>
+        </p:txBody>
+      </p:sp>
     </p:spTree>
     <p:extLst>
       <p:ext uri="{BB962C8B-B14F-4D97-AF65-F5344CB8AC3E}">
-        <p14:creationId xmlns:p14="http://schemas.microsoft.com/office/powerpoint/2010/main" val="1980549886"/>
+        <p14:creationId xmlns:p14="http://schemas.microsoft.com/office/powerpoint/2010/main" val="2644341032"/>
       </p:ext>
     </p:extLst>
   </p:cSld>
@@ -4306,13 +2255,7 @@
           <p:cNvGraphicFramePr>
             <a:graphicFrameLocks noGrp="1"/>
           </p:cNvGraphicFramePr>
-          <p:nvPr>
-            <p:extLst>
-              <p:ext uri="{D42A27DB-BD31-4B8C-83A1-F6EECF244321}">
-                <p14:modId xmlns:p14="http://schemas.microsoft.com/office/powerpoint/2010/main" val="1733711896"/>
-              </p:ext>
-            </p:extLst>
-          </p:nvPr>
+          <p:nvPr/>
         </p:nvGraphicFramePr>
         <p:xfrm>
           <a:off x="162341" y="1073020"/>
@@ -5324,10 +3267,65 @@
           </a:p>
         </p:txBody>
       </p:sp>
+      <p:sp>
+        <p:nvSpPr>
+          <p:cNvPr id="4" name="コンテンツ プレースホルダー 3">
+            <a:extLst>
+              <a:ext uri="{FF2B5EF4-FFF2-40B4-BE49-F238E27FC236}">
+                <a16:creationId xmlns:a16="http://schemas.microsoft.com/office/drawing/2014/main" id="{453D044A-F74E-3009-54AD-7DEAF87FB041}"/>
+              </a:ext>
+            </a:extLst>
+          </p:cNvPr>
+          <p:cNvSpPr>
+            <a:spLocks noGrp="1"/>
+          </p:cNvSpPr>
+          <p:nvPr>
+            <p:ph idx="1"/>
+          </p:nvPr>
+        </p:nvSpPr>
+        <p:spPr/>
+        <p:txBody>
+          <a:bodyPr/>
+          <a:lstStyle/>
+          <a:p>
+            <a:endParaRPr lang="ja-JP" altLang="en-US"/>
+          </a:p>
+        </p:txBody>
+      </p:sp>
+      <p:sp>
+        <p:nvSpPr>
+          <p:cNvPr id="5" name="スライド番号プレースホルダー 4">
+            <a:extLst>
+              <a:ext uri="{FF2B5EF4-FFF2-40B4-BE49-F238E27FC236}">
+                <a16:creationId xmlns:a16="http://schemas.microsoft.com/office/drawing/2014/main" id="{587843C9-A96A-6839-1387-44E63AFD7E7D}"/>
+              </a:ext>
+            </a:extLst>
+          </p:cNvPr>
+          <p:cNvSpPr>
+            <a:spLocks noGrp="1"/>
+          </p:cNvSpPr>
+          <p:nvPr>
+            <p:ph type="sldNum" sz="quarter" idx="12"/>
+          </p:nvPr>
+        </p:nvSpPr>
+        <p:spPr/>
+        <p:txBody>
+          <a:bodyPr/>
+          <a:lstStyle/>
+          <a:p>
+            <a:fld id="{9EBFBC76-F46F-4ADD-8228-9529630895ED}" type="slidenum">
+              <a:rPr lang="ja-JP" altLang="en-US" smtClean="0"/>
+              <a:pPr/>
+              <a:t>2</a:t>
+            </a:fld>
+            <a:endParaRPr lang="ja-JP" altLang="en-US" dirty="0"/>
+          </a:p>
+        </p:txBody>
+      </p:sp>
     </p:spTree>
     <p:extLst>
       <p:ext uri="{BB962C8B-B14F-4D97-AF65-F5344CB8AC3E}">
-        <p14:creationId xmlns:p14="http://schemas.microsoft.com/office/powerpoint/2010/main" val="10127502"/>
+        <p14:creationId xmlns:p14="http://schemas.microsoft.com/office/powerpoint/2010/main" val="2982444505"/>
       </p:ext>
     </p:extLst>
   </p:cSld>
@@ -5626,8 +3624,8 @@
         </p:nvSpPr>
         <p:spPr>
           <a:xfrm>
-            <a:off x="168275" y="1073150"/>
-            <a:ext cx="11877675" cy="5103813"/>
+            <a:off x="167951" y="1073020"/>
+            <a:ext cx="11877869" cy="5103943"/>
           </a:xfrm>
         </p:spPr>
         <p:txBody>
@@ -5651,10 +3649,7 @@
             <a:endParaRPr lang="en-US" altLang="ja-JP" dirty="0"/>
           </a:p>
           <a:p>
-            <a:pPr marL="914400" lvl="1" indent="-457200">
-              <a:buFont typeface="+mj-lt"/>
-              <a:buAutoNum type="arabicPeriod"/>
-            </a:pPr>
+            <a:pPr lvl="1"/>
             <a:r>
               <a:rPr lang="ja-JP" altLang="en-US" dirty="0"/>
               <a:t>講義</a:t>
@@ -5717,10 +3712,7 @@
             <a:endParaRPr lang="en-US" altLang="ja-JP" dirty="0"/>
           </a:p>
           <a:p>
-            <a:pPr marL="914400" lvl="1" indent="-457200">
-              <a:buFont typeface="+mj-lt"/>
-              <a:buAutoNum type="arabicPeriod"/>
-            </a:pPr>
+            <a:pPr lvl="1"/>
             <a:r>
               <a:rPr lang="ja-JP" altLang="en-US" dirty="0"/>
               <a:t>演習</a:t>
@@ -5775,10 +3767,40 @@
           </a:prstGeom>
         </p:spPr>
       </p:pic>
+      <p:sp>
+        <p:nvSpPr>
+          <p:cNvPr id="7" name="スライド番号プレースホルダー 6">
+            <a:extLst>
+              <a:ext uri="{FF2B5EF4-FFF2-40B4-BE49-F238E27FC236}">
+                <a16:creationId xmlns:a16="http://schemas.microsoft.com/office/drawing/2014/main" id="{6C41598B-CB0A-7FF5-055F-9B557C722F25}"/>
+              </a:ext>
+            </a:extLst>
+          </p:cNvPr>
+          <p:cNvSpPr>
+            <a:spLocks noGrp="1"/>
+          </p:cNvSpPr>
+          <p:nvPr>
+            <p:ph type="sldNum" sz="quarter" idx="12"/>
+          </p:nvPr>
+        </p:nvSpPr>
+        <p:spPr/>
+        <p:txBody>
+          <a:bodyPr/>
+          <a:lstStyle/>
+          <a:p>
+            <a:fld id="{9EBFBC76-F46F-4ADD-8228-9529630895ED}" type="slidenum">
+              <a:rPr lang="ja-JP" altLang="en-US" smtClean="0"/>
+              <a:pPr/>
+              <a:t>3</a:t>
+            </a:fld>
+            <a:endParaRPr lang="ja-JP" altLang="en-US" dirty="0"/>
+          </a:p>
+        </p:txBody>
+      </p:sp>
     </p:spTree>
     <p:extLst>
       <p:ext uri="{BB962C8B-B14F-4D97-AF65-F5344CB8AC3E}">
-        <p14:creationId xmlns:p14="http://schemas.microsoft.com/office/powerpoint/2010/main" val="3205634109"/>
+        <p14:creationId xmlns:p14="http://schemas.microsoft.com/office/powerpoint/2010/main" val="1051514888"/>
       </p:ext>
     </p:extLst>
   </p:cSld>

--- a/00_オリエンテーション/【AI Native研修-生成AI】研修の概要.pptx
+++ b/00_オリエンテーション/【AI Native研修-生成AI】研修の概要.pptx
@@ -199,7 +199,7 @@
           <a:p>
             <a:fld id="{3E092660-A910-48D6-9DD5-B02CDD5983C2}" type="datetimeFigureOut">
               <a:rPr kumimoji="1" lang="ja-JP" altLang="en-US" smtClean="0"/>
-              <a:t>2026/7/5</a:t>
+              <a:t>2026/8/7</a:t>
             </a:fld>
             <a:endParaRPr kumimoji="1" lang="ja-JP" altLang="en-US"/>
           </a:p>
@@ -1719,7 +1719,7 @@
           <a:p>
             <a:fld id="{97F8AAFB-F628-45BC-B43F-2D63EBB42CAB}" type="datetime1">
               <a:rPr kumimoji="1" lang="ja-JP" altLang="en-US" smtClean="0"/>
-              <a:t>2026/7/5</a:t>
+              <a:t>2026/8/7</a:t>
             </a:fld>
             <a:endParaRPr kumimoji="1" lang="ja-JP" altLang="en-US"/>
           </a:p>
@@ -3025,7 +3025,10 @@
             <a:avLst/>
           </a:prstGeom>
           <a:solidFill>
-            <a:srgbClr val="FFFFFF"/>
+            <a:schemeClr val="accent1">
+              <a:lumMod val="20000"/>
+              <a:lumOff val="80000"/>
+            </a:schemeClr>
           </a:solidFill>
           <a:ln w="3175" cap="flat" cmpd="sng" algn="ctr">
             <a:solidFill>
@@ -3264,31 +3267,6 @@
               <a:rPr lang="ja-JP" altLang="en-US" dirty="0"/>
               <a:t>研修の全体像について</a:t>
             </a:r>
-          </a:p>
-        </p:txBody>
-      </p:sp>
-      <p:sp>
-        <p:nvSpPr>
-          <p:cNvPr id="4" name="コンテンツ プレースホルダー 3">
-            <a:extLst>
-              <a:ext uri="{FF2B5EF4-FFF2-40B4-BE49-F238E27FC236}">
-                <a16:creationId xmlns:a16="http://schemas.microsoft.com/office/drawing/2014/main" id="{453D044A-F74E-3009-54AD-7DEAF87FB041}"/>
-              </a:ext>
-            </a:extLst>
-          </p:cNvPr>
-          <p:cNvSpPr>
-            <a:spLocks noGrp="1"/>
-          </p:cNvSpPr>
-          <p:nvPr>
-            <p:ph idx="1"/>
-          </p:nvPr>
-        </p:nvSpPr>
-        <p:spPr/>
-        <p:txBody>
-          <a:bodyPr/>
-          <a:lstStyle/>
-          <a:p>
-            <a:endParaRPr lang="ja-JP" altLang="en-US"/>
           </a:p>
         </p:txBody>
       </p:sp>
@@ -3737,36 +3715,6 @@
           </a:p>
         </p:txBody>
       </p:sp>
-      <p:pic>
-        <p:nvPicPr>
-          <p:cNvPr id="6" name="図 5">
-            <a:extLst>
-              <a:ext uri="{FF2B5EF4-FFF2-40B4-BE49-F238E27FC236}">
-                <a16:creationId xmlns:a16="http://schemas.microsoft.com/office/drawing/2014/main" id="{531BB476-0617-2BE4-9AB4-E5F799088C68}"/>
-              </a:ext>
-            </a:extLst>
-          </p:cNvPr>
-          <p:cNvPicPr>
-            <a:picLocks noChangeAspect="1"/>
-          </p:cNvPicPr>
-          <p:nvPr/>
-        </p:nvPicPr>
-        <p:blipFill>
-          <a:blip r:embed="rId3"/>
-          <a:stretch>
-            <a:fillRect/>
-          </a:stretch>
-        </p:blipFill>
-        <p:spPr>
-          <a:xfrm>
-            <a:off x="8420677" y="1073150"/>
-            <a:ext cx="3603048" cy="1688738"/>
-          </a:xfrm>
-          <a:prstGeom prst="rect">
-            <a:avLst/>
-          </a:prstGeom>
-        </p:spPr>
-      </p:pic>
       <p:sp>
         <p:nvSpPr>
           <p:cNvPr id="7" name="スライド番号プレースホルダー 6">
@@ -3797,6 +3745,36 @@
           </a:p>
         </p:txBody>
       </p:sp>
+      <p:pic>
+        <p:nvPicPr>
+          <p:cNvPr id="2" name="図 1">
+            <a:extLst>
+              <a:ext uri="{FF2B5EF4-FFF2-40B4-BE49-F238E27FC236}">
+                <a16:creationId xmlns:a16="http://schemas.microsoft.com/office/drawing/2014/main" id="{409959CA-8955-AF98-97BF-F2FAEB1D73C6}"/>
+              </a:ext>
+            </a:extLst>
+          </p:cNvPr>
+          <p:cNvPicPr>
+            <a:picLocks noChangeAspect="1"/>
+          </p:cNvPicPr>
+          <p:nvPr/>
+        </p:nvPicPr>
+        <p:blipFill>
+          <a:blip r:embed="rId3"/>
+          <a:stretch>
+            <a:fillRect/>
+          </a:stretch>
+        </p:blipFill>
+        <p:spPr>
+          <a:xfrm>
+            <a:off x="8215752" y="635124"/>
+            <a:ext cx="3603048" cy="1688738"/>
+          </a:xfrm>
+          <a:prstGeom prst="rect">
+            <a:avLst/>
+          </a:prstGeom>
+        </p:spPr>
+      </p:pic>
     </p:spTree>
     <p:extLst>
       <p:ext uri="{BB962C8B-B14F-4D97-AF65-F5344CB8AC3E}">
